--- a/export/Sovereign by habit.pptx
+++ b/export/Sovereign by habit.pptx
@@ -6492,7 +6492,7 @@
       </p:sp>
       <p:pic>
         <p:nvPicPr>
-          <p:cNvPr id="507" name="viz-10-00.svg" descr="viz-10-00.svg"/>
+          <p:cNvPr id="507" name="prog-10.png" descr="prog-10.png"/>
           <p:cNvPicPr>
             <a:picLocks noChangeAspect="1"/>
           </p:cNvPicPr>
@@ -6500,6 +6500,35 @@
         </p:nvPicPr>
         <p:blipFill>
           <a:blip r:embed="rId4">
+            <a:extLst/>
+          </a:blip>
+          <a:stretch>
+            <a:fillRect/>
+          </a:stretch>
+        </p:blipFill>
+        <p:spPr>
+          <a:xfrm>
+            <a:off x="17170400" y="12395200"/>
+            <a:ext cx="5842000" cy="406400"/>
+          </a:xfrm>
+          <a:prstGeom prst="rect">
+            <a:avLst/>
+          </a:prstGeom>
+          <a:ln w="12700">
+            <a:miter lim="400000"/>
+          </a:ln>
+        </p:spPr>
+      </p:pic>
+      <p:pic>
+        <p:nvPicPr>
+          <p:cNvPr id="508" name="viz-10-00.svg" descr="viz-10-00.svg"/>
+          <p:cNvPicPr>
+            <a:picLocks noChangeAspect="1"/>
+          </p:cNvPicPr>
+          <p:nvPr/>
+        </p:nvPicPr>
+        <p:blipFill>
+          <a:blip r:embed="rId5">
             <a:extLst/>
           </a:blip>
           <a:stretch>
@@ -6521,14 +6550,14 @@
       </p:pic>
       <p:pic>
         <p:nvPicPr>
-          <p:cNvPr id="508" name="viz-10-01.svg" descr="viz-10-01.svg"/>
-          <p:cNvPicPr>
-            <a:picLocks noChangeAspect="1"/>
-          </p:cNvPicPr>
-          <p:nvPr/>
-        </p:nvPicPr>
-        <p:blipFill>
-          <a:blip r:embed="rId5">
+          <p:cNvPr id="509" name="viz-10-01.svg" descr="viz-10-01.svg"/>
+          <p:cNvPicPr>
+            <a:picLocks noChangeAspect="1"/>
+          </p:cNvPicPr>
+          <p:nvPr/>
+        </p:nvPicPr>
+        <p:blipFill>
+          <a:blip r:embed="rId6">
             <a:extLst/>
           </a:blip>
           <a:stretch>
@@ -6550,14 +6579,14 @@
       </p:pic>
       <p:pic>
         <p:nvPicPr>
-          <p:cNvPr id="509" name="viz-10-02.svg" descr="viz-10-02.svg"/>
-          <p:cNvPicPr>
-            <a:picLocks noChangeAspect="1"/>
-          </p:cNvPicPr>
-          <p:nvPr/>
-        </p:nvPicPr>
-        <p:blipFill>
-          <a:blip r:embed="rId6">
+          <p:cNvPr id="510" name="viz-10-02.svg" descr="viz-10-02.svg"/>
+          <p:cNvPicPr>
+            <a:picLocks noChangeAspect="1"/>
+          </p:cNvPicPr>
+          <p:nvPr/>
+        </p:nvPicPr>
+        <p:blipFill>
+          <a:blip r:embed="rId7">
             <a:extLst/>
           </a:blip>
           <a:stretch>
@@ -6579,14 +6608,14 @@
       </p:pic>
       <p:pic>
         <p:nvPicPr>
-          <p:cNvPr id="510" name="viz-10-03.svg" descr="viz-10-03.svg"/>
-          <p:cNvPicPr>
-            <a:picLocks noChangeAspect="1"/>
-          </p:cNvPicPr>
-          <p:nvPr/>
-        </p:nvPicPr>
-        <p:blipFill>
-          <a:blip r:embed="rId7">
+          <p:cNvPr id="511" name="viz-10-03.svg" descr="viz-10-03.svg"/>
+          <p:cNvPicPr>
+            <a:picLocks noChangeAspect="1"/>
+          </p:cNvPicPr>
+          <p:nvPr/>
+        </p:nvPicPr>
+        <p:blipFill>
+          <a:blip r:embed="rId8">
             <a:extLst/>
           </a:blip>
           <a:stretch>
@@ -6608,14 +6637,14 @@
       </p:pic>
       <p:pic>
         <p:nvPicPr>
-          <p:cNvPr id="511" name="viz-10-04.svg" descr="viz-10-04.svg"/>
-          <p:cNvPicPr>
-            <a:picLocks noChangeAspect="1"/>
-          </p:cNvPicPr>
-          <p:nvPr/>
-        </p:nvPicPr>
-        <p:blipFill>
-          <a:blip r:embed="rId8">
+          <p:cNvPr id="512" name="viz-10-04.svg" descr="viz-10-04.svg"/>
+          <p:cNvPicPr>
+            <a:picLocks noChangeAspect="1"/>
+          </p:cNvPicPr>
+          <p:nvPr/>
+        </p:nvPicPr>
+        <p:blipFill>
+          <a:blip r:embed="rId9">
             <a:extLst/>
           </a:blip>
           <a:stretch>
@@ -6637,14 +6666,14 @@
       </p:pic>
       <p:pic>
         <p:nvPicPr>
-          <p:cNvPr id="512" name="viz-10-05.svg" descr="viz-10-05.svg"/>
-          <p:cNvPicPr>
-            <a:picLocks noChangeAspect="1"/>
-          </p:cNvPicPr>
-          <p:nvPr/>
-        </p:nvPicPr>
-        <p:blipFill>
-          <a:blip r:embed="rId7">
+          <p:cNvPr id="513" name="viz-10-05.svg" descr="viz-10-05.svg"/>
+          <p:cNvPicPr>
+            <a:picLocks noChangeAspect="1"/>
+          </p:cNvPicPr>
+          <p:nvPr/>
+        </p:nvPicPr>
+        <p:blipFill>
+          <a:blip r:embed="rId8">
             <a:extLst/>
           </a:blip>
           <a:stretch>
@@ -6666,14 +6695,14 @@
       </p:pic>
       <p:pic>
         <p:nvPicPr>
-          <p:cNvPr id="513" name="viz-10-06.svg" descr="viz-10-06.svg"/>
-          <p:cNvPicPr>
-            <a:picLocks noChangeAspect="1"/>
-          </p:cNvPicPr>
-          <p:nvPr/>
-        </p:nvPicPr>
-        <p:blipFill>
-          <a:blip r:embed="rId9">
+          <p:cNvPr id="514" name="viz-10-06.svg" descr="viz-10-06.svg"/>
+          <p:cNvPicPr>
+            <a:picLocks noChangeAspect="1"/>
+          </p:cNvPicPr>
+          <p:nvPr/>
+        </p:nvPicPr>
+        <p:blipFill>
+          <a:blip r:embed="rId10">
             <a:extLst/>
           </a:blip>
           <a:stretch>
@@ -6695,14 +6724,14 @@
       </p:pic>
       <p:pic>
         <p:nvPicPr>
-          <p:cNvPr id="514" name="viz-10-07.svg" descr="viz-10-07.svg"/>
-          <p:cNvPicPr>
-            <a:picLocks noChangeAspect="1"/>
-          </p:cNvPicPr>
-          <p:nvPr/>
-        </p:nvPicPr>
-        <p:blipFill>
-          <a:blip r:embed="rId10">
+          <p:cNvPr id="515" name="viz-10-07.svg" descr="viz-10-07.svg"/>
+          <p:cNvPicPr>
+            <a:picLocks noChangeAspect="1"/>
+          </p:cNvPicPr>
+          <p:nvPr/>
+        </p:nvPicPr>
+        <p:blipFill>
+          <a:blip r:embed="rId8">
             <a:extLst/>
           </a:blip>
           <a:stretch>
@@ -6724,7 +6753,7 @@
       </p:pic>
       <p:pic>
         <p:nvPicPr>
-          <p:cNvPr id="515" name="viz-10-08.svg" descr="viz-10-08.svg"/>
+          <p:cNvPr id="516" name="viz-10-08.svg" descr="viz-10-08.svg"/>
           <p:cNvPicPr>
             <a:picLocks noChangeAspect="1"/>
           </p:cNvPicPr>
@@ -6753,14 +6782,14 @@
       </p:pic>
       <p:pic>
         <p:nvPicPr>
-          <p:cNvPr id="516" name="viz-10-09.svg" descr="viz-10-09.svg"/>
-          <p:cNvPicPr>
-            <a:picLocks noChangeAspect="1"/>
-          </p:cNvPicPr>
-          <p:nvPr/>
-        </p:nvPicPr>
-        <p:blipFill>
-          <a:blip r:embed="rId7">
+          <p:cNvPr id="517" name="viz-10-09.svg" descr="viz-10-09.svg"/>
+          <p:cNvPicPr>
+            <a:picLocks noChangeAspect="1"/>
+          </p:cNvPicPr>
+          <p:nvPr/>
+        </p:nvPicPr>
+        <p:blipFill>
+          <a:blip r:embed="rId8">
             <a:extLst/>
           </a:blip>
           <a:stretch>
@@ -6782,7 +6811,7 @@
       </p:pic>
       <p:pic>
         <p:nvPicPr>
-          <p:cNvPr id="517" name="viz-10-10.svg" descr="viz-10-10.svg"/>
+          <p:cNvPr id="518" name="viz-10-10.svg" descr="viz-10-10.svg"/>
           <p:cNvPicPr>
             <a:picLocks noChangeAspect="1"/>
           </p:cNvPicPr>
@@ -6811,14 +6840,14 @@
       </p:pic>
       <p:pic>
         <p:nvPicPr>
-          <p:cNvPr id="518" name="viz-10-11.svg" descr="viz-10-11.svg"/>
-          <p:cNvPicPr>
-            <a:picLocks noChangeAspect="1"/>
-          </p:cNvPicPr>
-          <p:nvPr/>
-        </p:nvPicPr>
-        <p:blipFill>
-          <a:blip r:embed="rId7">
+          <p:cNvPr id="519" name="viz-10-11.svg" descr="viz-10-11.svg"/>
+          <p:cNvPicPr>
+            <a:picLocks noChangeAspect="1"/>
+          </p:cNvPicPr>
+          <p:nvPr/>
+        </p:nvPicPr>
+        <p:blipFill>
+          <a:blip r:embed="rId8">
             <a:extLst/>
           </a:blip>
           <a:stretch>
@@ -6840,7 +6869,7 @@
       </p:pic>
       <p:pic>
         <p:nvPicPr>
-          <p:cNvPr id="519" name="viz-10-12.svg" descr="viz-10-12.svg"/>
+          <p:cNvPr id="520" name="viz-10-12.svg" descr="viz-10-12.svg"/>
           <p:cNvPicPr>
             <a:picLocks noChangeAspect="1"/>
           </p:cNvPicPr>
@@ -6869,14 +6898,14 @@
       </p:pic>
       <p:pic>
         <p:nvPicPr>
-          <p:cNvPr id="520" name="viz-10-13.svg" descr="viz-10-13.svg"/>
-          <p:cNvPicPr>
-            <a:picLocks noChangeAspect="1"/>
-          </p:cNvPicPr>
-          <p:nvPr/>
-        </p:nvPicPr>
-        <p:blipFill>
-          <a:blip r:embed="rId7">
+          <p:cNvPr id="521" name="viz-10-13.svg" descr="viz-10-13.svg"/>
+          <p:cNvPicPr>
+            <a:picLocks noChangeAspect="1"/>
+          </p:cNvPicPr>
+          <p:nvPr/>
+        </p:nvPicPr>
+        <p:blipFill>
+          <a:blip r:embed="rId8">
             <a:extLst/>
           </a:blip>
           <a:stretch>
@@ -6898,7 +6927,7 @@
       </p:pic>
       <p:sp>
         <p:nvSpPr>
-          <p:cNvPr id="521" name="2015"/>
+          <p:cNvPr id="522" name="2015"/>
           <p:cNvSpPr txBox="1"/>
           <p:nvPr/>
         </p:nvSpPr>
@@ -6946,7 +6975,7 @@
       </p:sp>
       <p:sp>
         <p:nvSpPr>
-          <p:cNvPr id="522" name="A US cloud"/>
+          <p:cNvPr id="523" name="A US cloud"/>
           <p:cNvSpPr txBox="1"/>
           <p:nvPr/>
         </p:nvSpPr>
@@ -6994,7 +7023,7 @@
       </p:sp>
       <p:sp>
         <p:nvSpPr>
-          <p:cNvPr id="523" name="The first VPS."/>
+          <p:cNvPr id="524" name="The first VPS."/>
           <p:cNvSpPr txBox="1"/>
           <p:nvPr/>
         </p:nvSpPr>
@@ -7042,7 +7071,7 @@
       </p:sp>
       <p:sp>
         <p:nvSpPr>
-          <p:cNvPr id="524" name="2016"/>
+          <p:cNvPr id="525" name="2016"/>
           <p:cNvSpPr txBox="1"/>
           <p:nvPr/>
         </p:nvSpPr>
@@ -7090,7 +7119,7 @@
       </p:sp>
       <p:sp>
         <p:nvSpPr>
-          <p:cNvPr id="525" name="In France"/>
+          <p:cNvPr id="526" name="In France"/>
           <p:cNvSpPr txBox="1"/>
           <p:nvPr/>
         </p:nvSpPr>
@@ -7138,7 +7167,7 @@
       </p:sp>
       <p:sp>
         <p:nvSpPr>
-          <p:cNvPr id="526" name="2 web, 2 database and 1 file server."/>
+          <p:cNvPr id="527" name="2 web, 2 database and 1 file server."/>
           <p:cNvSpPr txBox="1"/>
           <p:nvPr/>
         </p:nvSpPr>
@@ -7188,7 +7217,7 @@
       </p:sp>
       <p:sp>
         <p:nvSpPr>
-          <p:cNvPr id="527" name="2016"/>
+          <p:cNvPr id="528" name="2016"/>
           <p:cNvSpPr txBox="1"/>
           <p:nvPr/>
         </p:nvSpPr>
@@ -7236,7 +7265,7 @@
       </p:sp>
       <p:sp>
         <p:nvSpPr>
-          <p:cNvPr id="528" name="The outage"/>
+          <p:cNvPr id="529" name="The outage"/>
           <p:cNvSpPr txBox="1"/>
           <p:nvPr/>
         </p:nvSpPr>
@@ -7284,7 +7313,7 @@
       </p:sp>
       <p:sp>
         <p:nvSpPr>
-          <p:cNvPr id="529" name="Every client site hangs."/>
+          <p:cNvPr id="530" name="Every client site hangs."/>
           <p:cNvSpPr txBox="1"/>
           <p:nvPr/>
         </p:nvSpPr>
@@ -7334,7 +7363,7 @@
       </p:sp>
       <p:sp>
         <p:nvSpPr>
-          <p:cNvPr id="530" name="2016"/>
+          <p:cNvPr id="531" name="2016"/>
           <p:cNvSpPr txBox="1"/>
           <p:nvPr/>
         </p:nvSpPr>
@@ -7382,7 +7411,7 @@
       </p:sp>
       <p:sp>
         <p:nvSpPr>
-          <p:cNvPr id="531" name="The move"/>
+          <p:cNvPr id="532" name="The move"/>
           <p:cNvSpPr txBox="1"/>
           <p:nvPr/>
         </p:nvSpPr>
@@ -7430,7 +7459,7 @@
       </p:sp>
       <p:sp>
         <p:nvSpPr>
-          <p:cNvPr id="532" name="Every site moved to a local data center in Finland."/>
+          <p:cNvPr id="533" name="Every site moved to a local data center in Finland."/>
           <p:cNvSpPr txBox="1"/>
           <p:nvPr/>
         </p:nvSpPr>
@@ -7484,7 +7513,7 @@
       </p:sp>
       <p:sp>
         <p:nvSpPr>
-          <p:cNvPr id="533" name="Since 2016"/>
+          <p:cNvPr id="534" name="Since 2016"/>
           <p:cNvSpPr txBox="1"/>
           <p:nvPr/>
         </p:nvSpPr>
@@ -7532,7 +7561,7 @@
       </p:sp>
       <p:sp>
         <p:nvSpPr>
-          <p:cNvPr id="534" name="The rock cave"/>
+          <p:cNvPr id="535" name="The rock cave"/>
           <p:cNvSpPr txBox="1"/>
           <p:nvPr/>
         </p:nvSpPr>
@@ -7580,7 +7609,7 @@
       </p:sp>
       <p:sp>
         <p:nvSpPr>
-          <p:cNvPr id="535" name="A datacentre in a former army rock cave, on wind power."/>
+          <p:cNvPr id="536" name="A datacentre in a former army rock cave, on wind power."/>
           <p:cNvSpPr txBox="1"/>
           <p:nvPr/>
         </p:nvSpPr>
@@ -7634,7 +7663,7 @@
       </p:sp>
       <p:sp>
         <p:nvSpPr>
-          <p:cNvPr id="536" name="2026"/>
+          <p:cNvPr id="537" name="2026"/>
           <p:cNvSpPr txBox="1"/>
           <p:nvPr/>
         </p:nvSpPr>
@@ -7682,7 +7711,7 @@
       </p:sp>
       <p:sp>
         <p:nvSpPr>
-          <p:cNvPr id="537" name="Today"/>
+          <p:cNvPr id="538" name="Today"/>
           <p:cNvSpPr txBox="1"/>
           <p:nvPr/>
         </p:nvSpPr>
@@ -7730,7 +7759,7 @@
       </p:sp>
       <p:sp>
         <p:nvSpPr>
-          <p:cNvPr id="538" name="Still on European servers, data on sovereign ground."/>
+          <p:cNvPr id="539" name="Still on European servers, data on sovereign ground."/>
           <p:cNvSpPr txBox="1"/>
           <p:nvPr/>
         </p:nvSpPr>
@@ -7778,35 +7807,6 @@
           </a:p>
         </p:txBody>
       </p:sp>
-      <p:pic>
-        <p:nvPicPr>
-          <p:cNvPr id="539" name="prog-10.png" descr="prog-10.png"/>
-          <p:cNvPicPr>
-            <a:picLocks noChangeAspect="1"/>
-          </p:cNvPicPr>
-          <p:nvPr/>
-        </p:nvPicPr>
-        <p:blipFill>
-          <a:blip r:embed="rId14">
-            <a:extLst/>
-          </a:blip>
-          <a:stretch>
-            <a:fillRect/>
-          </a:stretch>
-        </p:blipFill>
-        <p:spPr>
-          <a:xfrm>
-            <a:off x="17170400" y="12395200"/>
-            <a:ext cx="5842000" cy="406400"/>
-          </a:xfrm>
-          <a:prstGeom prst="rect">
-            <a:avLst/>
-          </a:prstGeom>
-          <a:ln w="12700">
-            <a:miter lim="400000"/>
-          </a:ln>
-        </p:spPr>
-      </p:pic>
     </p:spTree>
   </p:cSld>
   <p:clrMapOvr>
@@ -9600,8 +9600,8 @@
         </p:nvSpPr>
         <p:spPr>
           <a:xfrm>
-            <a:off x="12598400" y="5016500"/>
-            <a:ext cx="4470400" cy="457200"/>
+            <a:off x="12598400" y="5016499"/>
+            <a:ext cx="4470400" cy="457201"/>
           </a:xfrm>
           <a:prstGeom prst="rect">
             <a:avLst/>
@@ -9648,8 +9648,8 @@
         </p:nvSpPr>
         <p:spPr>
           <a:xfrm>
-            <a:off x="12598400" y="5727700"/>
-            <a:ext cx="4470400" cy="457200"/>
+            <a:off x="12598400" y="5727699"/>
+            <a:ext cx="4470400" cy="457201"/>
           </a:xfrm>
           <a:prstGeom prst="rect">
             <a:avLst/>
@@ -9696,8 +9696,8 @@
         </p:nvSpPr>
         <p:spPr>
           <a:xfrm>
-            <a:off x="12598400" y="6438900"/>
-            <a:ext cx="4470400" cy="457200"/>
+            <a:off x="12598400" y="6438899"/>
+            <a:ext cx="4470400" cy="457201"/>
           </a:xfrm>
           <a:prstGeom prst="rect">
             <a:avLst/>
@@ -9744,8 +9744,8 @@
         </p:nvSpPr>
         <p:spPr>
           <a:xfrm>
-            <a:off x="12598400" y="7150100"/>
-            <a:ext cx="4470400" cy="457200"/>
+            <a:off x="12598400" y="7150099"/>
+            <a:ext cx="4470400" cy="457201"/>
           </a:xfrm>
           <a:prstGeom prst="rect">
             <a:avLst/>
@@ -9792,8 +9792,8 @@
         </p:nvSpPr>
         <p:spPr>
           <a:xfrm>
-            <a:off x="12598400" y="7861300"/>
-            <a:ext cx="4470400" cy="457200"/>
+            <a:off x="12598400" y="7861299"/>
+            <a:ext cx="4470400" cy="457201"/>
           </a:xfrm>
           <a:prstGeom prst="rect">
             <a:avLst/>
@@ -10272,8 +10272,8 @@
         </p:nvSpPr>
         <p:spPr>
           <a:xfrm>
-            <a:off x="12395200" y="10185400"/>
-            <a:ext cx="4597289" cy="777240"/>
+            <a:off x="12395200" y="10185399"/>
+            <a:ext cx="4597289" cy="777241"/>
           </a:xfrm>
           <a:prstGeom prst="rect">
             <a:avLst/>
@@ -10368,8 +10368,8 @@
         </p:nvSpPr>
         <p:spPr>
           <a:xfrm>
-            <a:off x="17932399" y="10185399"/>
-            <a:ext cx="4318001" cy="777241"/>
+            <a:off x="17932400" y="10185399"/>
+            <a:ext cx="4318000" cy="777241"/>
           </a:xfrm>
           <a:prstGeom prst="rect">
             <a:avLst/>
@@ -11215,8 +11215,8 @@
         </p:nvSpPr>
         <p:spPr>
           <a:xfrm>
-            <a:off x="2514599" y="5321300"/>
-            <a:ext cx="4851401" cy="457200"/>
+            <a:off x="2514600" y="5321299"/>
+            <a:ext cx="4851400" cy="457201"/>
           </a:xfrm>
           <a:prstGeom prst="rect">
             <a:avLst/>
@@ -11263,8 +11263,8 @@
         </p:nvSpPr>
         <p:spPr>
           <a:xfrm>
-            <a:off x="2514599" y="5740400"/>
-            <a:ext cx="4851401" cy="431800"/>
+            <a:off x="2514600" y="5740399"/>
+            <a:ext cx="4851400" cy="431801"/>
           </a:xfrm>
           <a:prstGeom prst="rect">
             <a:avLst/>
@@ -11311,8 +11311,8 @@
         </p:nvSpPr>
         <p:spPr>
           <a:xfrm>
-            <a:off x="2514599" y="7226300"/>
-            <a:ext cx="4851401" cy="457200"/>
+            <a:off x="2514600" y="7226299"/>
+            <a:ext cx="4851400" cy="457201"/>
           </a:xfrm>
           <a:prstGeom prst="rect">
             <a:avLst/>
@@ -11359,8 +11359,8 @@
         </p:nvSpPr>
         <p:spPr>
           <a:xfrm>
-            <a:off x="2514599" y="7645400"/>
-            <a:ext cx="4851401" cy="431800"/>
+            <a:off x="2514600" y="7645399"/>
+            <a:ext cx="4851400" cy="431801"/>
           </a:xfrm>
           <a:prstGeom prst="rect">
             <a:avLst/>
@@ -11407,8 +11407,8 @@
         </p:nvSpPr>
         <p:spPr>
           <a:xfrm>
-            <a:off x="2514599" y="8966200"/>
-            <a:ext cx="4851401" cy="457200"/>
+            <a:off x="2514600" y="8966199"/>
+            <a:ext cx="4851400" cy="457201"/>
           </a:xfrm>
           <a:prstGeom prst="rect">
             <a:avLst/>
@@ -11455,8 +11455,8 @@
         </p:nvSpPr>
         <p:spPr>
           <a:xfrm>
-            <a:off x="2514599" y="9385300"/>
-            <a:ext cx="4851401" cy="728980"/>
+            <a:off x="2514600" y="9385300"/>
+            <a:ext cx="4851400" cy="728981"/>
           </a:xfrm>
           <a:prstGeom prst="rect">
             <a:avLst/>
@@ -11505,8 +11505,8 @@
         </p:nvSpPr>
         <p:spPr>
           <a:xfrm>
-            <a:off x="9829800" y="5156200"/>
-            <a:ext cx="2819400" cy="457200"/>
+            <a:off x="9829800" y="5156199"/>
+            <a:ext cx="2819400" cy="457201"/>
           </a:xfrm>
           <a:prstGeom prst="rect">
             <a:avLst/>
@@ -11554,7 +11554,7 @@
         <p:spPr>
           <a:xfrm>
             <a:off x="9829800" y="5575300"/>
-            <a:ext cx="2819400" cy="728980"/>
+            <a:ext cx="2819400" cy="728981"/>
           </a:xfrm>
           <a:prstGeom prst="rect">
             <a:avLst/>
@@ -11603,8 +11603,8 @@
         </p:nvSpPr>
         <p:spPr>
           <a:xfrm>
-            <a:off x="15417800" y="5397500"/>
-            <a:ext cx="5080000" cy="457200"/>
+            <a:off x="15417800" y="5397499"/>
+            <a:ext cx="5080000" cy="457201"/>
           </a:xfrm>
           <a:prstGeom prst="rect">
             <a:avLst/>
@@ -11651,8 +11651,8 @@
         </p:nvSpPr>
         <p:spPr>
           <a:xfrm>
-            <a:off x="14833600" y="6273800"/>
-            <a:ext cx="3556000" cy="457200"/>
+            <a:off x="14833600" y="6273799"/>
+            <a:ext cx="3556000" cy="457201"/>
           </a:xfrm>
           <a:prstGeom prst="rect">
             <a:avLst/>
@@ -11699,8 +11699,8 @@
         </p:nvSpPr>
         <p:spPr>
           <a:xfrm>
-            <a:off x="18973800" y="6273800"/>
-            <a:ext cx="3556000" cy="457200"/>
+            <a:off x="18973800" y="6273799"/>
+            <a:ext cx="3556000" cy="457201"/>
           </a:xfrm>
           <a:prstGeom prst="rect">
             <a:avLst/>
@@ -11747,8 +11747,8 @@
         </p:nvSpPr>
         <p:spPr>
           <a:xfrm>
-            <a:off x="14833600" y="7086600"/>
-            <a:ext cx="3556000" cy="457200"/>
+            <a:off x="14833600" y="7086599"/>
+            <a:ext cx="3556000" cy="457201"/>
           </a:xfrm>
           <a:prstGeom prst="rect">
             <a:avLst/>
@@ -11795,8 +11795,8 @@
         </p:nvSpPr>
         <p:spPr>
           <a:xfrm>
-            <a:off x="18973800" y="7086600"/>
-            <a:ext cx="3556000" cy="457200"/>
+            <a:off x="18973800" y="7086599"/>
+            <a:ext cx="3556000" cy="457201"/>
           </a:xfrm>
           <a:prstGeom prst="rect">
             <a:avLst/>
@@ -11843,8 +11843,8 @@
         </p:nvSpPr>
         <p:spPr>
           <a:xfrm>
-            <a:off x="14833600" y="7899400"/>
-            <a:ext cx="3556000" cy="457200"/>
+            <a:off x="14833600" y="7899399"/>
+            <a:ext cx="3556000" cy="457201"/>
           </a:xfrm>
           <a:prstGeom prst="rect">
             <a:avLst/>
@@ -11891,8 +11891,8 @@
         </p:nvSpPr>
         <p:spPr>
           <a:xfrm>
-            <a:off x="18973800" y="7899400"/>
-            <a:ext cx="3556000" cy="457200"/>
+            <a:off x="18973800" y="7899399"/>
+            <a:ext cx="3556000" cy="457201"/>
           </a:xfrm>
           <a:prstGeom prst="rect">
             <a:avLst/>
@@ -11939,8 +11939,8 @@
         </p:nvSpPr>
         <p:spPr>
           <a:xfrm>
-            <a:off x="14833600" y="8915400"/>
-            <a:ext cx="7620000" cy="457200"/>
+            <a:off x="14833600" y="8915399"/>
+            <a:ext cx="7620000" cy="457201"/>
           </a:xfrm>
           <a:prstGeom prst="rect">
             <a:avLst/>
@@ -11988,7 +11988,7 @@
         <p:spPr>
           <a:xfrm>
             <a:off x="14833600" y="9347200"/>
-            <a:ext cx="7620000" cy="728980"/>
+            <a:ext cx="7620000" cy="728981"/>
           </a:xfrm>
           <a:prstGeom prst="rect">
             <a:avLst/>
@@ -12430,7 +12430,7 @@
         <p:spPr>
           <a:xfrm>
             <a:off x="1752600" y="5740400"/>
-            <a:ext cx="2133601" cy="533400"/>
+            <a:ext cx="2133600" cy="533401"/>
           </a:xfrm>
           <a:prstGeom prst="rect">
             <a:avLst/>
@@ -12492,7 +12492,7 @@
         <p:spPr>
           <a:xfrm>
             <a:off x="1752600" y="6248400"/>
-            <a:ext cx="6604000" cy="533400"/>
+            <a:ext cx="6604000" cy="533401"/>
           </a:xfrm>
           <a:prstGeom prst="rect">
             <a:avLst/>
@@ -12614,7 +12614,7 @@
         <p:spPr>
           <a:xfrm>
             <a:off x="12992100" y="5740400"/>
-            <a:ext cx="9042400" cy="533400"/>
+            <a:ext cx="9042400" cy="533401"/>
           </a:xfrm>
           <a:prstGeom prst="rect">
             <a:avLst/>
@@ -12687,7 +12687,7 @@
         <p:spPr>
           <a:xfrm>
             <a:off x="12992100" y="6248400"/>
-            <a:ext cx="8229600" cy="533400"/>
+            <a:ext cx="8229600" cy="533401"/>
           </a:xfrm>
           <a:prstGeom prst="rect">
             <a:avLst/>
@@ -12793,7 +12793,7 @@
         <p:spPr>
           <a:xfrm>
             <a:off x="12992100" y="6756400"/>
-            <a:ext cx="6604000" cy="533400"/>
+            <a:ext cx="6604000" cy="533401"/>
           </a:xfrm>
           <a:prstGeom prst="rect">
             <a:avLst/>
@@ -12866,7 +12866,7 @@
         <p:spPr>
           <a:xfrm>
             <a:off x="12992100" y="7264400"/>
-            <a:ext cx="8839200" cy="533400"/>
+            <a:ext cx="8839200" cy="533401"/>
           </a:xfrm>
           <a:prstGeom prst="rect">
             <a:avLst/>
@@ -12936,7 +12936,7 @@
         <p:spPr>
           <a:xfrm>
             <a:off x="12992100" y="7772400"/>
-            <a:ext cx="2946400" cy="533400"/>
+            <a:ext cx="2946400" cy="533401"/>
           </a:xfrm>
           <a:prstGeom prst="rect">
             <a:avLst/>
@@ -14268,7 +14268,7 @@
         <p:spPr>
           <a:xfrm>
             <a:off x="2082800" y="5295900"/>
-            <a:ext cx="20955001" cy="723900"/>
+            <a:ext cx="20955000" cy="723901"/>
           </a:xfrm>
           <a:prstGeom prst="rect">
             <a:avLst/>
@@ -14652,7 +14652,7 @@
         <p:spPr>
           <a:xfrm>
             <a:off x="1320800" y="9702800"/>
-            <a:ext cx="552019" cy="723900"/>
+            <a:ext cx="552019" cy="723901"/>
           </a:xfrm>
           <a:prstGeom prst="rect">
             <a:avLst/>
@@ -14700,7 +14700,7 @@
         <p:spPr>
           <a:xfrm>
             <a:off x="2082800" y="9702800"/>
-            <a:ext cx="20955000" cy="723900"/>
+            <a:ext cx="20955000" cy="723901"/>
           </a:xfrm>
           <a:prstGeom prst="rect">
             <a:avLst/>
@@ -15129,7 +15129,7 @@
         </p:nvSpPr>
         <p:spPr>
           <a:xfrm>
-            <a:off x="2082800" y="7505699"/>
+            <a:off x="2082800" y="7505700"/>
             <a:ext cx="19064404" cy="723901"/>
           </a:xfrm>
           <a:prstGeom prst="rect">
@@ -17434,8 +17434,8 @@
         </p:nvSpPr>
         <p:spPr>
           <a:xfrm>
-            <a:off x="16230600" y="7073900"/>
-            <a:ext cx="1549400" cy="508000"/>
+            <a:off x="16230600" y="7073899"/>
+            <a:ext cx="1549400" cy="508001"/>
           </a:xfrm>
           <a:prstGeom prst="rect">
             <a:avLst/>
@@ -17483,7 +17483,7 @@
         <p:spPr>
           <a:xfrm>
             <a:off x="20853400" y="4902200"/>
-            <a:ext cx="1803400" cy="533400"/>
+            <a:ext cx="1803400" cy="533401"/>
           </a:xfrm>
           <a:prstGeom prst="rect">
             <a:avLst/>
@@ -17531,7 +17531,7 @@
         <p:spPr>
           <a:xfrm>
             <a:off x="20853400" y="7061200"/>
-            <a:ext cx="1803400" cy="533400"/>
+            <a:ext cx="1803400" cy="533401"/>
           </a:xfrm>
           <a:prstGeom prst="rect">
             <a:avLst/>
@@ -17579,7 +17579,7 @@
         <p:spPr>
           <a:xfrm>
             <a:off x="20853400" y="9220200"/>
-            <a:ext cx="1803400" cy="533400"/>
+            <a:ext cx="1803400" cy="533401"/>
           </a:xfrm>
           <a:prstGeom prst="rect">
             <a:avLst/>
@@ -19529,8 +19529,8 @@
         </p:nvSpPr>
         <p:spPr>
           <a:xfrm>
-            <a:off x="1295400" y="7213600"/>
-            <a:ext cx="10744200" cy="762000"/>
+            <a:off x="1295400" y="7213599"/>
+            <a:ext cx="10744200" cy="762001"/>
           </a:xfrm>
           <a:prstGeom prst="rect">
             <a:avLst/>
@@ -19625,8 +19625,8 @@
         </p:nvSpPr>
         <p:spPr>
           <a:xfrm>
-            <a:off x="12801600" y="7213600"/>
-            <a:ext cx="10744200" cy="762000"/>
+            <a:off x="12801600" y="7213599"/>
+            <a:ext cx="10744200" cy="762001"/>
           </a:xfrm>
           <a:prstGeom prst="rect">
             <a:avLst/>
@@ -19673,8 +19673,8 @@
         </p:nvSpPr>
         <p:spPr>
           <a:xfrm>
-            <a:off x="12826999" y="8039099"/>
-            <a:ext cx="9369454" cy="1163321"/>
+            <a:off x="12827000" y="8039099"/>
+            <a:ext cx="9369453" cy="1163321"/>
           </a:xfrm>
           <a:prstGeom prst="rect">
             <a:avLst/>
@@ -20405,7 +20405,7 @@
         <p:spPr>
           <a:xfrm>
             <a:off x="18126075" y="635000"/>
-            <a:ext cx="5651500" cy="1638301"/>
+            <a:ext cx="5651500" cy="1638300"/>
           </a:xfrm>
           <a:prstGeom prst="rect">
             <a:avLst/>
@@ -20423,8 +20423,8 @@
         </p:nvSpPr>
         <p:spPr>
           <a:xfrm>
-            <a:off x="1320800" y="4826000"/>
-            <a:ext cx="5588000" cy="546100"/>
+            <a:off x="1320800" y="4825999"/>
+            <a:ext cx="5588000" cy="546101"/>
           </a:xfrm>
           <a:prstGeom prst="rect">
             <a:avLst/>
@@ -20471,8 +20471,8 @@
         </p:nvSpPr>
         <p:spPr>
           <a:xfrm>
-            <a:off x="7874000" y="4826000"/>
-            <a:ext cx="6604000" cy="546100"/>
+            <a:off x="7874000" y="4825999"/>
+            <a:ext cx="6604000" cy="546101"/>
           </a:xfrm>
           <a:prstGeom prst="rect">
             <a:avLst/>
@@ -20519,8 +20519,8 @@
         </p:nvSpPr>
         <p:spPr>
           <a:xfrm>
-            <a:off x="14986000" y="4826000"/>
-            <a:ext cx="7620000" cy="546100"/>
+            <a:off x="14986000" y="4825999"/>
+            <a:ext cx="7620000" cy="546101"/>
           </a:xfrm>
           <a:prstGeom prst="rect">
             <a:avLst/>
@@ -20567,8 +20567,8 @@
         </p:nvSpPr>
         <p:spPr>
           <a:xfrm>
-            <a:off x="1625600" y="5816600"/>
-            <a:ext cx="5080000" cy="508000"/>
+            <a:off x="1625600" y="5816599"/>
+            <a:ext cx="5080000" cy="508001"/>
           </a:xfrm>
           <a:prstGeom prst="rect">
             <a:avLst/>
@@ -20615,8 +20615,8 @@
         </p:nvSpPr>
         <p:spPr>
           <a:xfrm>
-            <a:off x="8178800" y="5816600"/>
-            <a:ext cx="6096000" cy="508000"/>
+            <a:off x="8178800" y="5816599"/>
+            <a:ext cx="6096000" cy="508001"/>
           </a:xfrm>
           <a:prstGeom prst="rect">
             <a:avLst/>
@@ -20664,7 +20664,7 @@
         <p:spPr>
           <a:xfrm>
             <a:off x="14986000" y="5816600"/>
-            <a:ext cx="8128000" cy="495300"/>
+            <a:ext cx="8128000" cy="495301"/>
           </a:xfrm>
           <a:prstGeom prst="rect">
             <a:avLst/>
@@ -20711,8 +20711,8 @@
         </p:nvSpPr>
         <p:spPr>
           <a:xfrm>
-            <a:off x="1625600" y="6985000"/>
-            <a:ext cx="5080000" cy="508000"/>
+            <a:off x="1625600" y="6984999"/>
+            <a:ext cx="5080000" cy="508001"/>
           </a:xfrm>
           <a:prstGeom prst="rect">
             <a:avLst/>
@@ -20759,8 +20759,8 @@
         </p:nvSpPr>
         <p:spPr>
           <a:xfrm>
-            <a:off x="8178800" y="6985000"/>
-            <a:ext cx="6096000" cy="508000"/>
+            <a:off x="8178800" y="6984999"/>
+            <a:ext cx="6096000" cy="508001"/>
           </a:xfrm>
           <a:prstGeom prst="rect">
             <a:avLst/>
@@ -20808,7 +20808,7 @@
         <p:spPr>
           <a:xfrm>
             <a:off x="14986000" y="6985000"/>
-            <a:ext cx="8128000" cy="495300"/>
+            <a:ext cx="8128000" cy="495301"/>
           </a:xfrm>
           <a:prstGeom prst="rect">
             <a:avLst/>
@@ -20855,8 +20855,8 @@
         </p:nvSpPr>
         <p:spPr>
           <a:xfrm>
-            <a:off x="1625600" y="8153400"/>
-            <a:ext cx="5080000" cy="508000"/>
+            <a:off x="1625600" y="8153399"/>
+            <a:ext cx="5080000" cy="508001"/>
           </a:xfrm>
           <a:prstGeom prst="rect">
             <a:avLst/>
@@ -20903,8 +20903,8 @@
         </p:nvSpPr>
         <p:spPr>
           <a:xfrm>
-            <a:off x="8178800" y="8153400"/>
-            <a:ext cx="6096000" cy="508000"/>
+            <a:off x="8178800" y="8153399"/>
+            <a:ext cx="6096000" cy="508001"/>
           </a:xfrm>
           <a:prstGeom prst="rect">
             <a:avLst/>
@@ -20952,7 +20952,7 @@
         <p:spPr>
           <a:xfrm>
             <a:off x="14986000" y="8153400"/>
-            <a:ext cx="8128000" cy="495300"/>
+            <a:ext cx="8128000" cy="495301"/>
           </a:xfrm>
           <a:prstGeom prst="rect">
             <a:avLst/>
@@ -20999,8 +20999,8 @@
         </p:nvSpPr>
         <p:spPr>
           <a:xfrm>
-            <a:off x="1625600" y="9321800"/>
-            <a:ext cx="5080000" cy="508000"/>
+            <a:off x="1625600" y="9321799"/>
+            <a:ext cx="5080000" cy="508001"/>
           </a:xfrm>
           <a:prstGeom prst="rect">
             <a:avLst/>
@@ -21047,8 +21047,8 @@
         </p:nvSpPr>
         <p:spPr>
           <a:xfrm>
-            <a:off x="8178800" y="9321800"/>
-            <a:ext cx="6096000" cy="508000"/>
+            <a:off x="8178800" y="9321799"/>
+            <a:ext cx="6096000" cy="508001"/>
           </a:xfrm>
           <a:prstGeom prst="rect">
             <a:avLst/>
@@ -21096,7 +21096,7 @@
         <p:spPr>
           <a:xfrm>
             <a:off x="14986000" y="9321800"/>
-            <a:ext cx="8128000" cy="495300"/>
+            <a:ext cx="8128000" cy="495301"/>
           </a:xfrm>
           <a:prstGeom prst="rect">
             <a:avLst/>
@@ -21143,8 +21143,8 @@
         </p:nvSpPr>
         <p:spPr>
           <a:xfrm>
-            <a:off x="1625600" y="10490200"/>
-            <a:ext cx="5080000" cy="508000"/>
+            <a:off x="1625600" y="10490199"/>
+            <a:ext cx="5080000" cy="508001"/>
           </a:xfrm>
           <a:prstGeom prst="rect">
             <a:avLst/>
@@ -21191,8 +21191,8 @@
         </p:nvSpPr>
         <p:spPr>
           <a:xfrm>
-            <a:off x="8178800" y="10490200"/>
-            <a:ext cx="6096000" cy="508000"/>
+            <a:off x="8178800" y="10490199"/>
+            <a:ext cx="6096000" cy="508001"/>
           </a:xfrm>
           <a:prstGeom prst="rect">
             <a:avLst/>
@@ -21240,7 +21240,7 @@
         <p:spPr>
           <a:xfrm>
             <a:off x="14986000" y="10490200"/>
-            <a:ext cx="8128000" cy="495300"/>
+            <a:ext cx="8128000" cy="495301"/>
           </a:xfrm>
           <a:prstGeom prst="rect">
             <a:avLst/>
@@ -21287,7 +21287,7 @@
         </p:nvSpPr>
         <p:spPr>
           <a:xfrm>
-            <a:off x="19650075" y="1016000"/>
+            <a:off x="19650075" y="1015999"/>
             <a:ext cx="3810000" cy="457201"/>
           </a:xfrm>
           <a:prstGeom prst="rect">
@@ -21335,7 +21335,7 @@
         </p:nvSpPr>
         <p:spPr>
           <a:xfrm>
-            <a:off x="19650075" y="1397000"/>
+            <a:off x="19650075" y="1396999"/>
             <a:ext cx="3810000" cy="457201"/>
           </a:xfrm>
           <a:prstGeom prst="rect">
@@ -21400,7 +21400,7 @@
         <p:spPr>
           <a:xfrm>
             <a:off x="18507075" y="990600"/>
-            <a:ext cx="914400" cy="914401"/>
+            <a:ext cx="914400" cy="914400"/>
           </a:xfrm>
           <a:prstGeom prst="rect">
             <a:avLst/>
@@ -21637,8 +21637,8 @@
         </p:nvSpPr>
         <p:spPr>
           <a:xfrm>
-            <a:off x="1320800" y="4724400"/>
-            <a:ext cx="10160000" cy="762000"/>
+            <a:off x="1320800" y="4724399"/>
+            <a:ext cx="10160000" cy="762001"/>
           </a:xfrm>
           <a:prstGeom prst="rect">
             <a:avLst/>
@@ -21686,7 +21686,7 @@
         <p:spPr>
           <a:xfrm>
             <a:off x="1320800" y="5486400"/>
-            <a:ext cx="10160000" cy="533400"/>
+            <a:ext cx="10160000" cy="533401"/>
           </a:xfrm>
           <a:prstGeom prst="rect">
             <a:avLst/>
@@ -21781,8 +21781,8 @@
         </p:nvSpPr>
         <p:spPr>
           <a:xfrm>
-            <a:off x="2133600" y="6604000"/>
-            <a:ext cx="7527561" cy="1042670"/>
+            <a:off x="2133600" y="6603999"/>
+            <a:ext cx="7527561" cy="1042671"/>
           </a:xfrm>
           <a:prstGeom prst="rect">
             <a:avLst/>
@@ -21877,8 +21877,8 @@
         </p:nvSpPr>
         <p:spPr>
           <a:xfrm>
-            <a:off x="2133600" y="8178800"/>
-            <a:ext cx="9652000" cy="1042670"/>
+            <a:off x="2133600" y="8178799"/>
+            <a:ext cx="9652000" cy="1042671"/>
           </a:xfrm>
           <a:prstGeom prst="rect">
             <a:avLst/>
@@ -21974,7 +21974,7 @@
         <p:spPr>
           <a:xfrm>
             <a:off x="2133600" y="9753600"/>
-            <a:ext cx="9652000" cy="596900"/>
+            <a:ext cx="9652000" cy="596901"/>
           </a:xfrm>
           <a:prstGeom prst="rect">
             <a:avLst/>
@@ -22021,8 +22021,8 @@
         </p:nvSpPr>
         <p:spPr>
           <a:xfrm>
-            <a:off x="12801600" y="4724400"/>
-            <a:ext cx="10160000" cy="762000"/>
+            <a:off x="12801600" y="4724399"/>
+            <a:ext cx="10160000" cy="762001"/>
           </a:xfrm>
           <a:prstGeom prst="rect">
             <a:avLst/>
@@ -22070,7 +22070,7 @@
         <p:spPr>
           <a:xfrm>
             <a:off x="12801600" y="5486400"/>
-            <a:ext cx="10160000" cy="533400"/>
+            <a:ext cx="10160000" cy="533401"/>
           </a:xfrm>
           <a:prstGeom prst="rect">
             <a:avLst/>
@@ -22165,8 +22165,8 @@
         </p:nvSpPr>
         <p:spPr>
           <a:xfrm>
-            <a:off x="13614400" y="6604000"/>
-            <a:ext cx="10160000" cy="1042670"/>
+            <a:off x="13614400" y="6603999"/>
+            <a:ext cx="9398000" cy="1042671"/>
           </a:xfrm>
           <a:prstGeom prst="rect">
             <a:avLst/>
@@ -22261,8 +22261,8 @@
         </p:nvSpPr>
         <p:spPr>
           <a:xfrm>
-            <a:off x="13614400" y="7955915"/>
-            <a:ext cx="9652000" cy="1042671"/>
+            <a:off x="13614400" y="7950200"/>
+            <a:ext cx="9398000" cy="1042670"/>
           </a:xfrm>
           <a:prstGeom prst="rect">
             <a:avLst/>
@@ -22357,8 +22357,8 @@
         </p:nvSpPr>
         <p:spPr>
           <a:xfrm>
-            <a:off x="13614400" y="9753600"/>
-            <a:ext cx="9652000" cy="1042670"/>
+            <a:off x="13614400" y="9753599"/>
+            <a:ext cx="9398000" cy="1042671"/>
           </a:xfrm>
           <a:prstGeom prst="rect">
             <a:avLst/>
@@ -23066,7 +23066,7 @@
         <p:spPr>
           <a:xfrm>
             <a:off x="1854200" y="9169400"/>
-            <a:ext cx="17780000" cy="558800"/>
+            <a:ext cx="17780000" cy="558801"/>
           </a:xfrm>
           <a:prstGeom prst="rect">
             <a:avLst/>
@@ -23120,7 +23120,7 @@
         <p:spPr>
           <a:xfrm>
             <a:off x="1854200" y="9652000"/>
-            <a:ext cx="17780000" cy="558800"/>
+            <a:ext cx="17780000" cy="558801"/>
           </a:xfrm>
           <a:prstGeom prst="rect">
             <a:avLst/>
@@ -25051,8 +25051,8 @@
         </p:blipFill>
         <p:spPr>
           <a:xfrm>
-            <a:off x="8737599" y="1371600"/>
-            <a:ext cx="1463041" cy="355600"/>
+            <a:off x="8737600" y="1371600"/>
+            <a:ext cx="1463040" cy="355600"/>
           </a:xfrm>
           <a:prstGeom prst="rect">
             <a:avLst/>
@@ -25138,8 +25138,8 @@
         </p:blipFill>
         <p:spPr>
           <a:xfrm>
-            <a:off x="17970499" y="1397000"/>
-            <a:ext cx="1891097" cy="292100"/>
+            <a:off x="17970500" y="1397000"/>
+            <a:ext cx="1891096" cy="292100"/>
           </a:xfrm>
           <a:prstGeom prst="rect">
             <a:avLst/>
@@ -25167,8 +25167,8 @@
         </p:blipFill>
         <p:spPr>
           <a:xfrm>
-            <a:off x="21272500" y="1371599"/>
-            <a:ext cx="1749425" cy="368301"/>
+            <a:off x="21272500" y="1371600"/>
+            <a:ext cx="1749425" cy="368300"/>
           </a:xfrm>
           <a:prstGeom prst="rect">
             <a:avLst/>
@@ -25196,8 +25196,8 @@
         </p:blipFill>
         <p:spPr>
           <a:xfrm>
-            <a:off x="1320799" y="2260599"/>
-            <a:ext cx="1747521" cy="330201"/>
+            <a:off x="1320800" y="2260600"/>
+            <a:ext cx="1747521" cy="330200"/>
           </a:xfrm>
           <a:prstGeom prst="rect">
             <a:avLst/>
@@ -25254,8 +25254,8 @@
         </p:blipFill>
         <p:spPr>
           <a:xfrm>
-            <a:off x="6667499" y="2222500"/>
-            <a:ext cx="1417808" cy="419100"/>
+            <a:off x="6667500" y="2222500"/>
+            <a:ext cx="1417807" cy="419100"/>
           </a:xfrm>
           <a:prstGeom prst="rect">
             <a:avLst/>
@@ -25312,8 +25312,8 @@
         </p:blipFill>
         <p:spPr>
           <a:xfrm>
-            <a:off x="11163299" y="2197100"/>
-            <a:ext cx="1238866" cy="457200"/>
+            <a:off x="11163300" y="2197100"/>
+            <a:ext cx="1238865" cy="457200"/>
           </a:xfrm>
           <a:prstGeom prst="rect">
             <a:avLst/>
@@ -25370,8 +25370,8 @@
         </p:blipFill>
         <p:spPr>
           <a:xfrm>
-            <a:off x="16598900" y="2197099"/>
-            <a:ext cx="1097281" cy="457201"/>
+            <a:off x="16598900" y="2197100"/>
+            <a:ext cx="1097281" cy="457200"/>
           </a:xfrm>
           <a:prstGeom prst="rect">
             <a:avLst/>
@@ -25400,7 +25400,7 @@
         <p:spPr>
           <a:xfrm>
             <a:off x="18745200" y="2247900"/>
-            <a:ext cx="1821039" cy="368301"/>
+            <a:ext cx="1821039" cy="368300"/>
           </a:xfrm>
           <a:prstGeom prst="rect">
             <a:avLst/>
@@ -25428,8 +25428,8 @@
         </p:blipFill>
         <p:spPr>
           <a:xfrm>
-            <a:off x="21590000" y="2222499"/>
-            <a:ext cx="1409430" cy="406401"/>
+            <a:off x="21590000" y="2222500"/>
+            <a:ext cx="1409430" cy="406400"/>
           </a:xfrm>
           <a:prstGeom prst="rect">
             <a:avLst/>
@@ -25486,7 +25486,7 @@
         </p:blipFill>
         <p:spPr>
           <a:xfrm>
-            <a:off x="4190999" y="3200400"/>
+            <a:off x="4191000" y="3200400"/>
             <a:ext cx="1432561" cy="215900"/>
           </a:xfrm>
           <a:prstGeom prst="rect">
@@ -25544,8 +25544,8 @@
         </p:blipFill>
         <p:spPr>
           <a:xfrm>
-            <a:off x="9766299" y="3149600"/>
-            <a:ext cx="1743558" cy="330201"/>
+            <a:off x="9766300" y="3149600"/>
+            <a:ext cx="1743556" cy="330200"/>
           </a:xfrm>
           <a:prstGeom prst="rect">
             <a:avLst/>
@@ -25603,7 +25603,7 @@
         <p:spPr>
           <a:xfrm>
             <a:off x="15748000" y="3124200"/>
-            <a:ext cx="1411817" cy="368301"/>
+            <a:ext cx="1411817" cy="368300"/>
           </a:xfrm>
           <a:prstGeom prst="rect">
             <a:avLst/>
@@ -25632,7 +25632,7 @@
         <p:spPr>
           <a:xfrm>
             <a:off x="18453100" y="3149600"/>
-            <a:ext cx="1733551" cy="330201"/>
+            <a:ext cx="1733550" cy="330200"/>
           </a:xfrm>
           <a:prstGeom prst="rect">
             <a:avLst/>
@@ -25690,7 +25690,7 @@
         <p:spPr>
           <a:xfrm>
             <a:off x="1320800" y="4013200"/>
-            <a:ext cx="2493698" cy="368301"/>
+            <a:ext cx="2493698" cy="368300"/>
           </a:xfrm>
           <a:prstGeom prst="rect">
             <a:avLst/>
@@ -25748,7 +25748,7 @@
         <p:spPr>
           <a:xfrm>
             <a:off x="7874000" y="3975100"/>
-            <a:ext cx="1301751" cy="444500"/>
+            <a:ext cx="1301750" cy="444500"/>
           </a:xfrm>
           <a:prstGeom prst="rect">
             <a:avLst/>
@@ -25777,7 +25777,7 @@
         <p:spPr>
           <a:xfrm>
             <a:off x="10426700" y="4013200"/>
-            <a:ext cx="1941248" cy="368301"/>
+            <a:ext cx="1941248" cy="368300"/>
           </a:xfrm>
           <a:prstGeom prst="rect">
             <a:avLst/>
@@ -25805,8 +25805,8 @@
         </p:blipFill>
         <p:spPr>
           <a:xfrm>
-            <a:off x="13601699" y="3962399"/>
-            <a:ext cx="853441" cy="457201"/>
+            <a:off x="13601700" y="3962400"/>
+            <a:ext cx="853440" cy="457200"/>
           </a:xfrm>
           <a:prstGeom prst="rect">
             <a:avLst/>
@@ -25834,8 +25834,8 @@
         </p:blipFill>
         <p:spPr>
           <a:xfrm>
-            <a:off x="15697199" y="4013200"/>
-            <a:ext cx="2084642" cy="355600"/>
+            <a:off x="15697200" y="4013200"/>
+            <a:ext cx="2084641" cy="355600"/>
           </a:xfrm>
           <a:prstGeom prst="rect">
             <a:avLst/>
@@ -25863,8 +25863,8 @@
         </p:blipFill>
         <p:spPr>
           <a:xfrm>
-            <a:off x="18986499" y="4013200"/>
-            <a:ext cx="1673413" cy="355600"/>
+            <a:off x="18986500" y="4013200"/>
+            <a:ext cx="1673412" cy="355600"/>
           </a:xfrm>
           <a:prstGeom prst="rect">
             <a:avLst/>
@@ -25893,7 +25893,7 @@
         <p:spPr>
           <a:xfrm>
             <a:off x="21882100" y="4013200"/>
-            <a:ext cx="1138150" cy="368301"/>
+            <a:ext cx="1138150" cy="368300"/>
           </a:xfrm>
           <a:prstGeom prst="rect">
             <a:avLst/>
@@ -25921,8 +25921,8 @@
         </p:blipFill>
         <p:spPr>
           <a:xfrm>
-            <a:off x="1320799" y="4914900"/>
-            <a:ext cx="1637898" cy="317500"/>
+            <a:off x="1320800" y="4914900"/>
+            <a:ext cx="1637897" cy="317500"/>
           </a:xfrm>
           <a:prstGeom prst="rect">
             <a:avLst/>
@@ -25950,8 +25950,8 @@
         </p:blipFill>
         <p:spPr>
           <a:xfrm>
-            <a:off x="4000500" y="4965699"/>
-            <a:ext cx="1498889" cy="228601"/>
+            <a:off x="4000500" y="4965700"/>
+            <a:ext cx="1498889" cy="228600"/>
           </a:xfrm>
           <a:prstGeom prst="rect">
             <a:avLst/>
@@ -25979,8 +25979,8 @@
         </p:blipFill>
         <p:spPr>
           <a:xfrm>
-            <a:off x="6502400" y="4902199"/>
-            <a:ext cx="2021840" cy="355601"/>
+            <a:off x="6502400" y="4902200"/>
+            <a:ext cx="2021840" cy="355600"/>
           </a:xfrm>
           <a:prstGeom prst="rect">
             <a:avLst/>
@@ -26037,8 +26037,8 @@
         </p:blipFill>
         <p:spPr>
           <a:xfrm>
-            <a:off x="11556999" y="4927600"/>
-            <a:ext cx="1828801" cy="304801"/>
+            <a:off x="11557000" y="4927600"/>
+            <a:ext cx="1828800" cy="304800"/>
           </a:xfrm>
           <a:prstGeom prst="rect">
             <a:avLst/>
@@ -26066,8 +26066,8 @@
         </p:blipFill>
         <p:spPr>
           <a:xfrm>
-            <a:off x="14452600" y="4889499"/>
-            <a:ext cx="971903" cy="368301"/>
+            <a:off x="14452600" y="4889500"/>
+            <a:ext cx="971903" cy="368300"/>
           </a:xfrm>
           <a:prstGeom prst="rect">
             <a:avLst/>
@@ -26095,8 +26095,8 @@
         </p:blipFill>
         <p:spPr>
           <a:xfrm>
-            <a:off x="16459200" y="4889499"/>
-            <a:ext cx="1401587" cy="368301"/>
+            <a:off x="16459200" y="4889500"/>
+            <a:ext cx="1401587" cy="368300"/>
           </a:xfrm>
           <a:prstGeom prst="rect">
             <a:avLst/>
@@ -26124,8 +26124,8 @@
         </p:blipFill>
         <p:spPr>
           <a:xfrm>
-            <a:off x="18884899" y="4965700"/>
-            <a:ext cx="1592581" cy="215901"/>
+            <a:off x="18884900" y="4965700"/>
+            <a:ext cx="1592581" cy="215900"/>
           </a:xfrm>
           <a:prstGeom prst="rect">
             <a:avLst/>
@@ -26153,8 +26153,8 @@
         </p:blipFill>
         <p:spPr>
           <a:xfrm>
-            <a:off x="21501099" y="4889500"/>
-            <a:ext cx="1516681" cy="368300"/>
+            <a:off x="21501100" y="4889500"/>
+            <a:ext cx="1516680" cy="368300"/>
           </a:xfrm>
           <a:prstGeom prst="rect">
             <a:avLst/>
@@ -26183,7 +26183,7 @@
         <p:spPr>
           <a:xfrm>
             <a:off x="1320800" y="5778500"/>
-            <a:ext cx="2519275" cy="368301"/>
+            <a:ext cx="2519275" cy="368300"/>
           </a:xfrm>
           <a:prstGeom prst="rect">
             <a:avLst/>
@@ -26270,7 +26270,7 @@
         <p:spPr>
           <a:xfrm>
             <a:off x="11607800" y="5854700"/>
-            <a:ext cx="1802514" cy="215900"/>
+            <a:ext cx="1802515" cy="215900"/>
           </a:xfrm>
           <a:prstGeom prst="rect">
             <a:avLst/>
@@ -26328,7 +26328,7 @@
         <p:spPr>
           <a:xfrm>
             <a:off x="17983200" y="5803900"/>
-            <a:ext cx="2243528" cy="304801"/>
+            <a:ext cx="2243528" cy="304800"/>
           </a:xfrm>
           <a:prstGeom prst="rect">
             <a:avLst/>
@@ -26357,7 +26357,7 @@
         <p:spPr>
           <a:xfrm>
             <a:off x="21793200" y="5778500"/>
-            <a:ext cx="1225110" cy="368301"/>
+            <a:ext cx="1225110" cy="368300"/>
           </a:xfrm>
           <a:prstGeom prst="rect">
             <a:avLst/>
@@ -26385,8 +26385,8 @@
         </p:blipFill>
         <p:spPr>
           <a:xfrm>
-            <a:off x="1320800" y="6654799"/>
-            <a:ext cx="1127919" cy="368301"/>
+            <a:off x="1320800" y="6654800"/>
+            <a:ext cx="1127919" cy="368300"/>
           </a:xfrm>
           <a:prstGeom prst="rect">
             <a:avLst/>
@@ -26414,8 +26414,8 @@
         </p:blipFill>
         <p:spPr>
           <a:xfrm>
-            <a:off x="3492499" y="6654800"/>
-            <a:ext cx="1808252" cy="368301"/>
+            <a:off x="3492500" y="6654800"/>
+            <a:ext cx="1808251" cy="368300"/>
           </a:xfrm>
           <a:prstGeom prst="rect">
             <a:avLst/>
@@ -26444,7 +26444,7 @@
         <p:spPr>
           <a:xfrm>
             <a:off x="6337300" y="6616700"/>
-            <a:ext cx="1200150" cy="457201"/>
+            <a:ext cx="1200150" cy="457200"/>
           </a:xfrm>
           <a:prstGeom prst="rect">
             <a:avLst/>
@@ -26472,8 +26472,8 @@
         </p:blipFill>
         <p:spPr>
           <a:xfrm>
-            <a:off x="8585200" y="6654799"/>
-            <a:ext cx="1557603" cy="368301"/>
+            <a:off x="8585200" y="6654800"/>
+            <a:ext cx="1557603" cy="368300"/>
           </a:xfrm>
           <a:prstGeom prst="rect">
             <a:avLst/>
@@ -26530,8 +26530,8 @@
         </p:blipFill>
         <p:spPr>
           <a:xfrm>
-            <a:off x="13881099" y="6629400"/>
-            <a:ext cx="1345225" cy="431800"/>
+            <a:off x="13881100" y="6629400"/>
+            <a:ext cx="1345224" cy="431800"/>
           </a:xfrm>
           <a:prstGeom prst="rect">
             <a:avLst/>
@@ -26559,8 +26559,8 @@
         </p:blipFill>
         <p:spPr>
           <a:xfrm>
-            <a:off x="16281400" y="6667499"/>
-            <a:ext cx="1397190" cy="342901"/>
+            <a:off x="16281400" y="6667500"/>
+            <a:ext cx="1397190" cy="342900"/>
           </a:xfrm>
           <a:prstGeom prst="rect">
             <a:avLst/>
@@ -26647,7 +26647,7 @@
         <p:spPr>
           <a:xfrm>
             <a:off x="1320800" y="7518400"/>
-            <a:ext cx="1408177" cy="419100"/>
+            <a:ext cx="1408176" cy="419100"/>
           </a:xfrm>
           <a:prstGeom prst="rect">
             <a:avLst/>
@@ -26676,7 +26676,7 @@
         <p:spPr>
           <a:xfrm>
             <a:off x="3695700" y="7543800"/>
-            <a:ext cx="1750060" cy="355601"/>
+            <a:ext cx="1750061" cy="355600"/>
           </a:xfrm>
           <a:prstGeom prst="rect">
             <a:avLst/>
@@ -26704,8 +26704,8 @@
         </p:blipFill>
         <p:spPr>
           <a:xfrm>
-            <a:off x="6438899" y="7543799"/>
-            <a:ext cx="1790349" cy="368301"/>
+            <a:off x="6438900" y="7543800"/>
+            <a:ext cx="1790348" cy="368300"/>
           </a:xfrm>
           <a:prstGeom prst="rect">
             <a:avLst/>
@@ -26791,8 +26791,8 @@
         </p:blipFill>
         <p:spPr>
           <a:xfrm>
-            <a:off x="14744699" y="7556500"/>
-            <a:ext cx="1153200" cy="330201"/>
+            <a:off x="14744700" y="7556500"/>
+            <a:ext cx="1153199" cy="330200"/>
           </a:xfrm>
           <a:prstGeom prst="rect">
             <a:avLst/>
@@ -26820,8 +26820,8 @@
         </p:blipFill>
         <p:spPr>
           <a:xfrm>
-            <a:off x="16891000" y="7543799"/>
-            <a:ext cx="1676400" cy="355601"/>
+            <a:off x="16891000" y="7543800"/>
+            <a:ext cx="1676400" cy="355600"/>
           </a:xfrm>
           <a:prstGeom prst="rect">
             <a:avLst/>
@@ -26849,8 +26849,8 @@
         </p:blipFill>
         <p:spPr>
           <a:xfrm>
-            <a:off x="19532600" y="7581899"/>
-            <a:ext cx="1335481" cy="279401"/>
+            <a:off x="19532600" y="7581900"/>
+            <a:ext cx="1335481" cy="279400"/>
           </a:xfrm>
           <a:prstGeom prst="rect">
             <a:avLst/>
@@ -26907,8 +26907,8 @@
         </p:blipFill>
         <p:spPr>
           <a:xfrm>
-            <a:off x="1320799" y="8420100"/>
-            <a:ext cx="2125399" cy="368300"/>
+            <a:off x="1320800" y="8420100"/>
+            <a:ext cx="2125398" cy="368300"/>
           </a:xfrm>
           <a:prstGeom prst="rect">
             <a:avLst/>
@@ -26937,7 +26937,7 @@
         <p:spPr>
           <a:xfrm>
             <a:off x="4622800" y="8432800"/>
-            <a:ext cx="1212945" cy="342901"/>
+            <a:ext cx="1212945" cy="342900"/>
           </a:xfrm>
           <a:prstGeom prst="rect">
             <a:avLst/>
@@ -26965,8 +26965,8 @@
         </p:blipFill>
         <p:spPr>
           <a:xfrm>
-            <a:off x="7035799" y="8381999"/>
-            <a:ext cx="763525" cy="457201"/>
+            <a:off x="7035800" y="8382000"/>
+            <a:ext cx="763524" cy="457200"/>
           </a:xfrm>
           <a:prstGeom prst="rect">
             <a:avLst/>
@@ -26994,8 +26994,8 @@
         </p:blipFill>
         <p:spPr>
           <a:xfrm>
-            <a:off x="8991599" y="8420099"/>
-            <a:ext cx="2557640" cy="368301"/>
+            <a:off x="8991600" y="8420100"/>
+            <a:ext cx="2557639" cy="368300"/>
           </a:xfrm>
           <a:prstGeom prst="rect">
             <a:avLst/>
@@ -27053,7 +27053,7 @@
         <p:spPr>
           <a:xfrm>
             <a:off x="16052800" y="8420100"/>
-            <a:ext cx="1539699" cy="368301"/>
+            <a:ext cx="1539699" cy="368300"/>
           </a:xfrm>
           <a:prstGeom prst="rect">
             <a:avLst/>
@@ -27082,7 +27082,7 @@
         <p:spPr>
           <a:xfrm>
             <a:off x="18783300" y="8432800"/>
-            <a:ext cx="1572127" cy="355601"/>
+            <a:ext cx="1572127" cy="355600"/>
           </a:xfrm>
           <a:prstGeom prst="rect">
             <a:avLst/>
@@ -27110,8 +27110,8 @@
         </p:blipFill>
         <p:spPr>
           <a:xfrm>
-            <a:off x="21577300" y="8420099"/>
-            <a:ext cx="1445066" cy="368301"/>
+            <a:off x="21577300" y="8420100"/>
+            <a:ext cx="1445066" cy="368300"/>
           </a:xfrm>
           <a:prstGeom prst="rect">
             <a:avLst/>
@@ -27139,8 +27139,8 @@
         </p:blipFill>
         <p:spPr>
           <a:xfrm>
-            <a:off x="1320799" y="9309100"/>
-            <a:ext cx="1351281" cy="355601"/>
+            <a:off x="1320800" y="9309100"/>
+            <a:ext cx="1351281" cy="355600"/>
           </a:xfrm>
           <a:prstGeom prst="rect">
             <a:avLst/>
@@ -27168,8 +27168,8 @@
         </p:blipFill>
         <p:spPr>
           <a:xfrm>
-            <a:off x="3924300" y="9309099"/>
-            <a:ext cx="1424905" cy="355601"/>
+            <a:off x="3924300" y="9309100"/>
+            <a:ext cx="1424905" cy="355600"/>
           </a:xfrm>
           <a:prstGeom prst="rect">
             <a:avLst/>
@@ -27197,8 +27197,8 @@
         </p:blipFill>
         <p:spPr>
           <a:xfrm>
-            <a:off x="6642099" y="9309100"/>
-            <a:ext cx="2204686" cy="368300"/>
+            <a:off x="6642100" y="9309100"/>
+            <a:ext cx="2204685" cy="368300"/>
           </a:xfrm>
           <a:prstGeom prst="rect">
             <a:avLst/>
@@ -27255,8 +27255,8 @@
         </p:blipFill>
         <p:spPr>
           <a:xfrm>
-            <a:off x="12738099" y="9309099"/>
-            <a:ext cx="1718735" cy="355601"/>
+            <a:off x="12738100" y="9309100"/>
+            <a:ext cx="1718734" cy="355600"/>
           </a:xfrm>
           <a:prstGeom prst="rect">
             <a:avLst/>
@@ -27284,8 +27284,8 @@
         </p:blipFill>
         <p:spPr>
           <a:xfrm>
-            <a:off x="15684500" y="9321799"/>
-            <a:ext cx="1694330" cy="342901"/>
+            <a:off x="15684500" y="9321800"/>
+            <a:ext cx="1694330" cy="342900"/>
           </a:xfrm>
           <a:prstGeom prst="rect">
             <a:avLst/>
@@ -27314,7 +27314,7 @@
         <p:spPr>
           <a:xfrm>
             <a:off x="18643600" y="9283700"/>
-            <a:ext cx="1466574" cy="406401"/>
+            <a:ext cx="1466574" cy="406400"/>
           </a:xfrm>
           <a:prstGeom prst="rect">
             <a:avLst/>
@@ -27342,8 +27342,8 @@
         </p:blipFill>
         <p:spPr>
           <a:xfrm>
-            <a:off x="21348699" y="9321800"/>
-            <a:ext cx="1645105" cy="342900"/>
+            <a:off x="21348700" y="9321800"/>
+            <a:ext cx="1645104" cy="342900"/>
           </a:xfrm>
           <a:prstGeom prst="rect">
             <a:avLst/>
@@ -27372,7 +27372,7 @@
         <p:spPr>
           <a:xfrm>
             <a:off x="1320800" y="10185400"/>
-            <a:ext cx="2268626" cy="368301"/>
+            <a:ext cx="2268626" cy="368300"/>
           </a:xfrm>
           <a:prstGeom prst="rect">
             <a:avLst/>
@@ -27429,8 +27429,8 @@
         </p:blipFill>
         <p:spPr>
           <a:xfrm>
-            <a:off x="7137399" y="10172699"/>
-            <a:ext cx="1440874" cy="406401"/>
+            <a:off x="7137400" y="10172700"/>
+            <a:ext cx="1440873" cy="406400"/>
           </a:xfrm>
           <a:prstGeom prst="rect">
             <a:avLst/>
@@ -27458,8 +27458,8 @@
         </p:blipFill>
         <p:spPr>
           <a:xfrm>
-            <a:off x="9575800" y="10147299"/>
-            <a:ext cx="1097280" cy="457201"/>
+            <a:off x="9575800" y="10147300"/>
+            <a:ext cx="1097281" cy="457200"/>
           </a:xfrm>
           <a:prstGeom prst="rect">
             <a:avLst/>
@@ -27516,8 +27516,8 @@
         </p:blipFill>
         <p:spPr>
           <a:xfrm>
-            <a:off x="14058900" y="10185399"/>
-            <a:ext cx="989807" cy="368301"/>
+            <a:off x="14058900" y="10185400"/>
+            <a:ext cx="989807" cy="368300"/>
           </a:xfrm>
           <a:prstGeom prst="rect">
             <a:avLst/>
@@ -27604,7 +27604,7 @@
         <p:spPr>
           <a:xfrm>
             <a:off x="21539200" y="10185400"/>
-            <a:ext cx="1485989" cy="368301"/>
+            <a:ext cx="1485989" cy="368300"/>
           </a:xfrm>
           <a:prstGeom prst="rect">
             <a:avLst/>
@@ -27632,8 +27632,8 @@
         </p:blipFill>
         <p:spPr>
           <a:xfrm>
-            <a:off x="1320800" y="11087099"/>
-            <a:ext cx="1796446" cy="330201"/>
+            <a:off x="1320800" y="11087100"/>
+            <a:ext cx="1796446" cy="330200"/>
           </a:xfrm>
           <a:prstGeom prst="rect">
             <a:avLst/>
@@ -27662,7 +27662,7 @@
         <p:spPr>
           <a:xfrm>
             <a:off x="4508500" y="11074400"/>
-            <a:ext cx="1171399" cy="368301"/>
+            <a:ext cx="1171399" cy="368300"/>
           </a:xfrm>
           <a:prstGeom prst="rect">
             <a:avLst/>
@@ -27690,8 +27690,8 @@
         </p:blipFill>
         <p:spPr>
           <a:xfrm>
-            <a:off x="7086600" y="11074399"/>
-            <a:ext cx="1397000" cy="355601"/>
+            <a:off x="7086600" y="11074400"/>
+            <a:ext cx="1397000" cy="355600"/>
           </a:xfrm>
           <a:prstGeom prst="rect">
             <a:avLst/>
@@ -27719,8 +27719,8 @@
         </p:blipFill>
         <p:spPr>
           <a:xfrm>
-            <a:off x="9893300" y="11074399"/>
-            <a:ext cx="1397000" cy="355601"/>
+            <a:off x="9893300" y="11074400"/>
+            <a:ext cx="1397000" cy="355600"/>
           </a:xfrm>
           <a:prstGeom prst="rect">
             <a:avLst/>
@@ -27778,7 +27778,7 @@
         <p:spPr>
           <a:xfrm>
             <a:off x="15697200" y="11074400"/>
-            <a:ext cx="1829653" cy="342900"/>
+            <a:ext cx="1829654" cy="342900"/>
           </a:xfrm>
           <a:prstGeom prst="rect">
             <a:avLst/>
@@ -27806,8 +27806,8 @@
         </p:blipFill>
         <p:spPr>
           <a:xfrm>
-            <a:off x="18923000" y="11074399"/>
-            <a:ext cx="1537141" cy="368301"/>
+            <a:off x="18923000" y="11074400"/>
+            <a:ext cx="1537141" cy="368300"/>
           </a:xfrm>
           <a:prstGeom prst="rect">
             <a:avLst/>
@@ -27836,7 +27836,7 @@
         <p:spPr>
           <a:xfrm>
             <a:off x="21856700" y="11074400"/>
-            <a:ext cx="1163726" cy="368301"/>
+            <a:ext cx="1163726" cy="368300"/>
           </a:xfrm>
           <a:prstGeom prst="rect">
             <a:avLst/>
@@ -28054,8 +28054,8 @@
         </p:blipFill>
         <p:spPr>
           <a:xfrm>
-            <a:off x="8737599" y="1371600"/>
-            <a:ext cx="1463041" cy="355600"/>
+            <a:off x="8737600" y="1371600"/>
+            <a:ext cx="1463040" cy="355600"/>
           </a:xfrm>
           <a:prstGeom prst="rect">
             <a:avLst/>
@@ -28141,8 +28141,8 @@
         </p:blipFill>
         <p:spPr>
           <a:xfrm>
-            <a:off x="17970499" y="1397000"/>
-            <a:ext cx="1891097" cy="292100"/>
+            <a:off x="17970500" y="1397000"/>
+            <a:ext cx="1891096" cy="292100"/>
           </a:xfrm>
           <a:prstGeom prst="rect">
             <a:avLst/>
@@ -28170,8 +28170,8 @@
         </p:blipFill>
         <p:spPr>
           <a:xfrm>
-            <a:off x="21272500" y="1371599"/>
-            <a:ext cx="1749425" cy="368301"/>
+            <a:off x="21272500" y="1371600"/>
+            <a:ext cx="1749425" cy="368300"/>
           </a:xfrm>
           <a:prstGeom prst="rect">
             <a:avLst/>
@@ -28199,8 +28199,8 @@
         </p:blipFill>
         <p:spPr>
           <a:xfrm>
-            <a:off x="1320799" y="2260599"/>
-            <a:ext cx="1747521" cy="330201"/>
+            <a:off x="1320800" y="2260600"/>
+            <a:ext cx="1747521" cy="330200"/>
           </a:xfrm>
           <a:prstGeom prst="rect">
             <a:avLst/>
@@ -28257,8 +28257,8 @@
         </p:blipFill>
         <p:spPr>
           <a:xfrm>
-            <a:off x="6667499" y="2222500"/>
-            <a:ext cx="1417808" cy="419100"/>
+            <a:off x="6667500" y="2222500"/>
+            <a:ext cx="1417807" cy="419100"/>
           </a:xfrm>
           <a:prstGeom prst="rect">
             <a:avLst/>
@@ -28315,8 +28315,8 @@
         </p:blipFill>
         <p:spPr>
           <a:xfrm>
-            <a:off x="11163299" y="2197100"/>
-            <a:ext cx="1238866" cy="457200"/>
+            <a:off x="11163300" y="2197100"/>
+            <a:ext cx="1238865" cy="457200"/>
           </a:xfrm>
           <a:prstGeom prst="rect">
             <a:avLst/>
@@ -28373,8 +28373,8 @@
         </p:blipFill>
         <p:spPr>
           <a:xfrm>
-            <a:off x="16598900" y="2197099"/>
-            <a:ext cx="1097281" cy="457201"/>
+            <a:off x="16598900" y="2197100"/>
+            <a:ext cx="1097281" cy="457200"/>
           </a:xfrm>
           <a:prstGeom prst="rect">
             <a:avLst/>
@@ -28403,7 +28403,7 @@
         <p:spPr>
           <a:xfrm>
             <a:off x="18745200" y="2247900"/>
-            <a:ext cx="1821039" cy="368301"/>
+            <a:ext cx="1821039" cy="368300"/>
           </a:xfrm>
           <a:prstGeom prst="rect">
             <a:avLst/>
@@ -28431,8 +28431,8 @@
         </p:blipFill>
         <p:spPr>
           <a:xfrm>
-            <a:off x="21590000" y="2222499"/>
-            <a:ext cx="1409430" cy="406401"/>
+            <a:off x="21590000" y="2222500"/>
+            <a:ext cx="1409430" cy="406400"/>
           </a:xfrm>
           <a:prstGeom prst="rect">
             <a:avLst/>
@@ -28489,7 +28489,7 @@
         </p:blipFill>
         <p:spPr>
           <a:xfrm>
-            <a:off x="4190999" y="3200400"/>
+            <a:off x="4191000" y="3200400"/>
             <a:ext cx="1432561" cy="215900"/>
           </a:xfrm>
           <a:prstGeom prst="rect">
@@ -28547,8 +28547,8 @@
         </p:blipFill>
         <p:spPr>
           <a:xfrm>
-            <a:off x="9766299" y="3149600"/>
-            <a:ext cx="1743558" cy="330201"/>
+            <a:off x="9766300" y="3149600"/>
+            <a:ext cx="1743556" cy="330200"/>
           </a:xfrm>
           <a:prstGeom prst="rect">
             <a:avLst/>
@@ -28606,7 +28606,7 @@
         <p:spPr>
           <a:xfrm>
             <a:off x="15748000" y="3124200"/>
-            <a:ext cx="1411817" cy="368301"/>
+            <a:ext cx="1411817" cy="368300"/>
           </a:xfrm>
           <a:prstGeom prst="rect">
             <a:avLst/>
@@ -28635,7 +28635,7 @@
         <p:spPr>
           <a:xfrm>
             <a:off x="18453100" y="3149600"/>
-            <a:ext cx="1733551" cy="330201"/>
+            <a:ext cx="1733550" cy="330200"/>
           </a:xfrm>
           <a:prstGeom prst="rect">
             <a:avLst/>
@@ -28693,7 +28693,7 @@
         <p:spPr>
           <a:xfrm>
             <a:off x="1320800" y="4013200"/>
-            <a:ext cx="2493698" cy="368301"/>
+            <a:ext cx="2493698" cy="368300"/>
           </a:xfrm>
           <a:prstGeom prst="rect">
             <a:avLst/>
@@ -28751,7 +28751,7 @@
         <p:spPr>
           <a:xfrm>
             <a:off x="7874000" y="3975100"/>
-            <a:ext cx="1301751" cy="444500"/>
+            <a:ext cx="1301750" cy="444500"/>
           </a:xfrm>
           <a:prstGeom prst="rect">
             <a:avLst/>
@@ -28780,7 +28780,7 @@
         <p:spPr>
           <a:xfrm>
             <a:off x="10426700" y="4013200"/>
-            <a:ext cx="1941248" cy="368301"/>
+            <a:ext cx="1941248" cy="368300"/>
           </a:xfrm>
           <a:prstGeom prst="rect">
             <a:avLst/>
@@ -28808,8 +28808,8 @@
         </p:blipFill>
         <p:spPr>
           <a:xfrm>
-            <a:off x="13601699" y="3962399"/>
-            <a:ext cx="853441" cy="457201"/>
+            <a:off x="13601700" y="3962400"/>
+            <a:ext cx="853440" cy="457200"/>
           </a:xfrm>
           <a:prstGeom prst="rect">
             <a:avLst/>
@@ -28837,8 +28837,8 @@
         </p:blipFill>
         <p:spPr>
           <a:xfrm>
-            <a:off x="15697199" y="4013200"/>
-            <a:ext cx="2084642" cy="355600"/>
+            <a:off x="15697200" y="4013200"/>
+            <a:ext cx="2084641" cy="355600"/>
           </a:xfrm>
           <a:prstGeom prst="rect">
             <a:avLst/>
@@ -28866,8 +28866,8 @@
         </p:blipFill>
         <p:spPr>
           <a:xfrm>
-            <a:off x="18986499" y="4013200"/>
-            <a:ext cx="1673413" cy="355600"/>
+            <a:off x="18986500" y="4013200"/>
+            <a:ext cx="1673412" cy="355600"/>
           </a:xfrm>
           <a:prstGeom prst="rect">
             <a:avLst/>
@@ -28896,7 +28896,7 @@
         <p:spPr>
           <a:xfrm>
             <a:off x="21882100" y="4013200"/>
-            <a:ext cx="1138150" cy="368301"/>
+            <a:ext cx="1138150" cy="368300"/>
           </a:xfrm>
           <a:prstGeom prst="rect">
             <a:avLst/>
@@ -28924,8 +28924,8 @@
         </p:blipFill>
         <p:spPr>
           <a:xfrm>
-            <a:off x="1320799" y="4914900"/>
-            <a:ext cx="1637898" cy="317500"/>
+            <a:off x="1320800" y="4914900"/>
+            <a:ext cx="1637897" cy="317500"/>
           </a:xfrm>
           <a:prstGeom prst="rect">
             <a:avLst/>
@@ -28953,8 +28953,8 @@
         </p:blipFill>
         <p:spPr>
           <a:xfrm>
-            <a:off x="4000500" y="4965699"/>
-            <a:ext cx="1498889" cy="228601"/>
+            <a:off x="4000500" y="4965700"/>
+            <a:ext cx="1498889" cy="228600"/>
           </a:xfrm>
           <a:prstGeom prst="rect">
             <a:avLst/>
@@ -28982,8 +28982,8 @@
         </p:blipFill>
         <p:spPr>
           <a:xfrm>
-            <a:off x="6502400" y="4902199"/>
-            <a:ext cx="2021840" cy="355601"/>
+            <a:off x="6502400" y="4902200"/>
+            <a:ext cx="2021840" cy="355600"/>
           </a:xfrm>
           <a:prstGeom prst="rect">
             <a:avLst/>
@@ -29040,8 +29040,8 @@
         </p:blipFill>
         <p:spPr>
           <a:xfrm>
-            <a:off x="11556999" y="4927600"/>
-            <a:ext cx="1828801" cy="304801"/>
+            <a:off x="11557000" y="4927600"/>
+            <a:ext cx="1828800" cy="304800"/>
           </a:xfrm>
           <a:prstGeom prst="rect">
             <a:avLst/>
@@ -29069,8 +29069,8 @@
         </p:blipFill>
         <p:spPr>
           <a:xfrm>
-            <a:off x="14452600" y="4889499"/>
-            <a:ext cx="971903" cy="368301"/>
+            <a:off x="14452600" y="4889500"/>
+            <a:ext cx="971903" cy="368300"/>
           </a:xfrm>
           <a:prstGeom prst="rect">
             <a:avLst/>
@@ -29098,8 +29098,8 @@
         </p:blipFill>
         <p:spPr>
           <a:xfrm>
-            <a:off x="16459200" y="4889499"/>
-            <a:ext cx="1401587" cy="368301"/>
+            <a:off x="16459200" y="4889500"/>
+            <a:ext cx="1401587" cy="368300"/>
           </a:xfrm>
           <a:prstGeom prst="rect">
             <a:avLst/>
@@ -29127,8 +29127,8 @@
         </p:blipFill>
         <p:spPr>
           <a:xfrm>
-            <a:off x="18884899" y="4965700"/>
-            <a:ext cx="1592581" cy="215901"/>
+            <a:off x="18884900" y="4965700"/>
+            <a:ext cx="1592581" cy="215900"/>
           </a:xfrm>
           <a:prstGeom prst="rect">
             <a:avLst/>
@@ -29156,8 +29156,8 @@
         </p:blipFill>
         <p:spPr>
           <a:xfrm>
-            <a:off x="21501099" y="4889500"/>
-            <a:ext cx="1516681" cy="368300"/>
+            <a:off x="21501100" y="4889500"/>
+            <a:ext cx="1516680" cy="368300"/>
           </a:xfrm>
           <a:prstGeom prst="rect">
             <a:avLst/>
@@ -29186,7 +29186,7 @@
         <p:spPr>
           <a:xfrm>
             <a:off x="1320800" y="5778500"/>
-            <a:ext cx="2519275" cy="368301"/>
+            <a:ext cx="2519275" cy="368300"/>
           </a:xfrm>
           <a:prstGeom prst="rect">
             <a:avLst/>
@@ -29273,7 +29273,7 @@
         <p:spPr>
           <a:xfrm>
             <a:off x="11607800" y="5854700"/>
-            <a:ext cx="1802514" cy="215900"/>
+            <a:ext cx="1802515" cy="215900"/>
           </a:xfrm>
           <a:prstGeom prst="rect">
             <a:avLst/>
@@ -29331,7 +29331,7 @@
         <p:spPr>
           <a:xfrm>
             <a:off x="17983200" y="5803900"/>
-            <a:ext cx="2243528" cy="304801"/>
+            <a:ext cx="2243528" cy="304800"/>
           </a:xfrm>
           <a:prstGeom prst="rect">
             <a:avLst/>
@@ -29360,7 +29360,7 @@
         <p:spPr>
           <a:xfrm>
             <a:off x="21793200" y="5778500"/>
-            <a:ext cx="1225110" cy="368301"/>
+            <a:ext cx="1225110" cy="368300"/>
           </a:xfrm>
           <a:prstGeom prst="rect">
             <a:avLst/>
@@ -29388,8 +29388,8 @@
         </p:blipFill>
         <p:spPr>
           <a:xfrm>
-            <a:off x="1320800" y="6654799"/>
-            <a:ext cx="1127919" cy="368301"/>
+            <a:off x="1320800" y="6654800"/>
+            <a:ext cx="1127919" cy="368300"/>
           </a:xfrm>
           <a:prstGeom prst="rect">
             <a:avLst/>
@@ -29417,8 +29417,8 @@
         </p:blipFill>
         <p:spPr>
           <a:xfrm>
-            <a:off x="3492499" y="6654800"/>
-            <a:ext cx="1808252" cy="368301"/>
+            <a:off x="3492500" y="6654800"/>
+            <a:ext cx="1808251" cy="368300"/>
           </a:xfrm>
           <a:prstGeom prst="rect">
             <a:avLst/>
@@ -29447,7 +29447,7 @@
         <p:spPr>
           <a:xfrm>
             <a:off x="6337300" y="6616700"/>
-            <a:ext cx="1200150" cy="457201"/>
+            <a:ext cx="1200150" cy="457200"/>
           </a:xfrm>
           <a:prstGeom prst="rect">
             <a:avLst/>
@@ -29475,8 +29475,8 @@
         </p:blipFill>
         <p:spPr>
           <a:xfrm>
-            <a:off x="8585200" y="6654799"/>
-            <a:ext cx="1557603" cy="368301"/>
+            <a:off x="8585200" y="6654800"/>
+            <a:ext cx="1557603" cy="368300"/>
           </a:xfrm>
           <a:prstGeom prst="rect">
             <a:avLst/>
@@ -29533,8 +29533,8 @@
         </p:blipFill>
         <p:spPr>
           <a:xfrm>
-            <a:off x="13881099" y="6629400"/>
-            <a:ext cx="1345225" cy="431800"/>
+            <a:off x="13881100" y="6629400"/>
+            <a:ext cx="1345224" cy="431800"/>
           </a:xfrm>
           <a:prstGeom prst="rect">
             <a:avLst/>
@@ -29562,8 +29562,8 @@
         </p:blipFill>
         <p:spPr>
           <a:xfrm>
-            <a:off x="16281400" y="6667499"/>
-            <a:ext cx="1397190" cy="342901"/>
+            <a:off x="16281400" y="6667500"/>
+            <a:ext cx="1397190" cy="342900"/>
           </a:xfrm>
           <a:prstGeom prst="rect">
             <a:avLst/>
@@ -29650,7 +29650,7 @@
         <p:spPr>
           <a:xfrm>
             <a:off x="1320800" y="7518400"/>
-            <a:ext cx="1408177" cy="419100"/>
+            <a:ext cx="1408176" cy="419100"/>
           </a:xfrm>
           <a:prstGeom prst="rect">
             <a:avLst/>
@@ -29679,7 +29679,7 @@
         <p:spPr>
           <a:xfrm>
             <a:off x="3695700" y="7543800"/>
-            <a:ext cx="1750060" cy="355601"/>
+            <a:ext cx="1750061" cy="355600"/>
           </a:xfrm>
           <a:prstGeom prst="rect">
             <a:avLst/>
@@ -29707,8 +29707,8 @@
         </p:blipFill>
         <p:spPr>
           <a:xfrm>
-            <a:off x="6438899" y="7543799"/>
-            <a:ext cx="1790349" cy="368301"/>
+            <a:off x="6438900" y="7543800"/>
+            <a:ext cx="1790348" cy="368300"/>
           </a:xfrm>
           <a:prstGeom prst="rect">
             <a:avLst/>
@@ -29794,8 +29794,8 @@
         </p:blipFill>
         <p:spPr>
           <a:xfrm>
-            <a:off x="14744699" y="7556500"/>
-            <a:ext cx="1153200" cy="330201"/>
+            <a:off x="14744700" y="7556500"/>
+            <a:ext cx="1153199" cy="330200"/>
           </a:xfrm>
           <a:prstGeom prst="rect">
             <a:avLst/>
@@ -29823,8 +29823,8 @@
         </p:blipFill>
         <p:spPr>
           <a:xfrm>
-            <a:off x="16891000" y="7543799"/>
-            <a:ext cx="1676400" cy="355601"/>
+            <a:off x="16891000" y="7543800"/>
+            <a:ext cx="1676400" cy="355600"/>
           </a:xfrm>
           <a:prstGeom prst="rect">
             <a:avLst/>
@@ -29852,8 +29852,8 @@
         </p:blipFill>
         <p:spPr>
           <a:xfrm>
-            <a:off x="19532600" y="7581899"/>
-            <a:ext cx="1335481" cy="279401"/>
+            <a:off x="19532600" y="7581900"/>
+            <a:ext cx="1335481" cy="279400"/>
           </a:xfrm>
           <a:prstGeom prst="rect">
             <a:avLst/>
@@ -29910,8 +29910,8 @@
         </p:blipFill>
         <p:spPr>
           <a:xfrm>
-            <a:off x="1320799" y="8420100"/>
-            <a:ext cx="2125399" cy="368300"/>
+            <a:off x="1320800" y="8420100"/>
+            <a:ext cx="2125398" cy="368300"/>
           </a:xfrm>
           <a:prstGeom prst="rect">
             <a:avLst/>
@@ -29940,7 +29940,7 @@
         <p:spPr>
           <a:xfrm>
             <a:off x="4622800" y="8432800"/>
-            <a:ext cx="1212945" cy="342901"/>
+            <a:ext cx="1212945" cy="342900"/>
           </a:xfrm>
           <a:prstGeom prst="rect">
             <a:avLst/>
@@ -29968,8 +29968,8 @@
         </p:blipFill>
         <p:spPr>
           <a:xfrm>
-            <a:off x="7035799" y="8381999"/>
-            <a:ext cx="763525" cy="457201"/>
+            <a:off x="7035800" y="8382000"/>
+            <a:ext cx="763524" cy="457200"/>
           </a:xfrm>
           <a:prstGeom prst="rect">
             <a:avLst/>
@@ -29997,8 +29997,8 @@
         </p:blipFill>
         <p:spPr>
           <a:xfrm>
-            <a:off x="8991599" y="8420099"/>
-            <a:ext cx="2557640" cy="368301"/>
+            <a:off x="8991600" y="8420100"/>
+            <a:ext cx="2557639" cy="368300"/>
           </a:xfrm>
           <a:prstGeom prst="rect">
             <a:avLst/>
@@ -30056,7 +30056,7 @@
         <p:spPr>
           <a:xfrm>
             <a:off x="16052800" y="8420100"/>
-            <a:ext cx="1539699" cy="368301"/>
+            <a:ext cx="1539699" cy="368300"/>
           </a:xfrm>
           <a:prstGeom prst="rect">
             <a:avLst/>
@@ -30085,7 +30085,7 @@
         <p:spPr>
           <a:xfrm>
             <a:off x="18783300" y="8432800"/>
-            <a:ext cx="1572127" cy="355601"/>
+            <a:ext cx="1572127" cy="355600"/>
           </a:xfrm>
           <a:prstGeom prst="rect">
             <a:avLst/>
@@ -30113,8 +30113,8 @@
         </p:blipFill>
         <p:spPr>
           <a:xfrm>
-            <a:off x="21577300" y="8420099"/>
-            <a:ext cx="1445066" cy="368301"/>
+            <a:off x="21577300" y="8420100"/>
+            <a:ext cx="1445066" cy="368300"/>
           </a:xfrm>
           <a:prstGeom prst="rect">
             <a:avLst/>
@@ -30142,8 +30142,8 @@
         </p:blipFill>
         <p:spPr>
           <a:xfrm>
-            <a:off x="1320799" y="9309100"/>
-            <a:ext cx="1351281" cy="355601"/>
+            <a:off x="1320800" y="9309100"/>
+            <a:ext cx="1351281" cy="355600"/>
           </a:xfrm>
           <a:prstGeom prst="rect">
             <a:avLst/>
@@ -30171,8 +30171,8 @@
         </p:blipFill>
         <p:spPr>
           <a:xfrm>
-            <a:off x="3924300" y="9309099"/>
-            <a:ext cx="1424905" cy="355601"/>
+            <a:off x="3924300" y="9309100"/>
+            <a:ext cx="1424905" cy="355600"/>
           </a:xfrm>
           <a:prstGeom prst="rect">
             <a:avLst/>
@@ -30200,8 +30200,8 @@
         </p:blipFill>
         <p:spPr>
           <a:xfrm>
-            <a:off x="6642099" y="9309100"/>
-            <a:ext cx="2204686" cy="368300"/>
+            <a:off x="6642100" y="9309100"/>
+            <a:ext cx="2204685" cy="368300"/>
           </a:xfrm>
           <a:prstGeom prst="rect">
             <a:avLst/>
@@ -30258,8 +30258,8 @@
         </p:blipFill>
         <p:spPr>
           <a:xfrm>
-            <a:off x="12738099" y="9309099"/>
-            <a:ext cx="1718735" cy="355601"/>
+            <a:off x="12738100" y="9309100"/>
+            <a:ext cx="1718734" cy="355600"/>
           </a:xfrm>
           <a:prstGeom prst="rect">
             <a:avLst/>
@@ -30287,8 +30287,8 @@
         </p:blipFill>
         <p:spPr>
           <a:xfrm>
-            <a:off x="15684500" y="9321799"/>
-            <a:ext cx="1694330" cy="342901"/>
+            <a:off x="15684500" y="9321800"/>
+            <a:ext cx="1694330" cy="342900"/>
           </a:xfrm>
           <a:prstGeom prst="rect">
             <a:avLst/>
@@ -30317,7 +30317,7 @@
         <p:spPr>
           <a:xfrm>
             <a:off x="18643600" y="9283700"/>
-            <a:ext cx="1466574" cy="406401"/>
+            <a:ext cx="1466574" cy="406400"/>
           </a:xfrm>
           <a:prstGeom prst="rect">
             <a:avLst/>
@@ -30345,8 +30345,8 @@
         </p:blipFill>
         <p:spPr>
           <a:xfrm>
-            <a:off x="21348699" y="9321800"/>
-            <a:ext cx="1645105" cy="342900"/>
+            <a:off x="21348700" y="9321800"/>
+            <a:ext cx="1645104" cy="342900"/>
           </a:xfrm>
           <a:prstGeom prst="rect">
             <a:avLst/>
@@ -30375,7 +30375,7 @@
         <p:spPr>
           <a:xfrm>
             <a:off x="1320800" y="10185400"/>
-            <a:ext cx="2268626" cy="368301"/>
+            <a:ext cx="2268626" cy="368300"/>
           </a:xfrm>
           <a:prstGeom prst="rect">
             <a:avLst/>
@@ -30432,8 +30432,8 @@
         </p:blipFill>
         <p:spPr>
           <a:xfrm>
-            <a:off x="7137399" y="10172699"/>
-            <a:ext cx="1440874" cy="406401"/>
+            <a:off x="7137400" y="10172700"/>
+            <a:ext cx="1440873" cy="406400"/>
           </a:xfrm>
           <a:prstGeom prst="rect">
             <a:avLst/>
@@ -30461,8 +30461,8 @@
         </p:blipFill>
         <p:spPr>
           <a:xfrm>
-            <a:off x="9575800" y="10147299"/>
-            <a:ext cx="1097280" cy="457201"/>
+            <a:off x="9575800" y="10147300"/>
+            <a:ext cx="1097281" cy="457200"/>
           </a:xfrm>
           <a:prstGeom prst="rect">
             <a:avLst/>
@@ -30519,8 +30519,8 @@
         </p:blipFill>
         <p:spPr>
           <a:xfrm>
-            <a:off x="14058900" y="10185399"/>
-            <a:ext cx="989807" cy="368301"/>
+            <a:off x="14058900" y="10185400"/>
+            <a:ext cx="989807" cy="368300"/>
           </a:xfrm>
           <a:prstGeom prst="rect">
             <a:avLst/>
@@ -30607,7 +30607,7 @@
         <p:spPr>
           <a:xfrm>
             <a:off x="21539200" y="10185400"/>
-            <a:ext cx="1485989" cy="368301"/>
+            <a:ext cx="1485989" cy="368300"/>
           </a:xfrm>
           <a:prstGeom prst="rect">
             <a:avLst/>
@@ -30635,8 +30635,8 @@
         </p:blipFill>
         <p:spPr>
           <a:xfrm>
-            <a:off x="1320800" y="11087099"/>
-            <a:ext cx="1796446" cy="330201"/>
+            <a:off x="1320800" y="11087100"/>
+            <a:ext cx="1796446" cy="330200"/>
           </a:xfrm>
           <a:prstGeom prst="rect">
             <a:avLst/>
@@ -30665,7 +30665,7 @@
         <p:spPr>
           <a:xfrm>
             <a:off x="4508500" y="11074400"/>
-            <a:ext cx="1171399" cy="368301"/>
+            <a:ext cx="1171399" cy="368300"/>
           </a:xfrm>
           <a:prstGeom prst="rect">
             <a:avLst/>
@@ -30693,8 +30693,8 @@
         </p:blipFill>
         <p:spPr>
           <a:xfrm>
-            <a:off x="7086600" y="11074399"/>
-            <a:ext cx="1397000" cy="355601"/>
+            <a:off x="7086600" y="11074400"/>
+            <a:ext cx="1397000" cy="355600"/>
           </a:xfrm>
           <a:prstGeom prst="rect">
             <a:avLst/>
@@ -30722,8 +30722,8 @@
         </p:blipFill>
         <p:spPr>
           <a:xfrm>
-            <a:off x="9893300" y="11074399"/>
-            <a:ext cx="1397000" cy="355601"/>
+            <a:off x="9893300" y="11074400"/>
+            <a:ext cx="1397000" cy="355600"/>
           </a:xfrm>
           <a:prstGeom prst="rect">
             <a:avLst/>
@@ -30781,7 +30781,7 @@
         <p:spPr>
           <a:xfrm>
             <a:off x="15697200" y="11074400"/>
-            <a:ext cx="1829653" cy="342900"/>
+            <a:ext cx="1829654" cy="342900"/>
           </a:xfrm>
           <a:prstGeom prst="rect">
             <a:avLst/>
@@ -30809,8 +30809,8 @@
         </p:blipFill>
         <p:spPr>
           <a:xfrm>
-            <a:off x="18923000" y="11074399"/>
-            <a:ext cx="1537141" cy="368301"/>
+            <a:off x="18923000" y="11074400"/>
+            <a:ext cx="1537141" cy="368300"/>
           </a:xfrm>
           <a:prstGeom prst="rect">
             <a:avLst/>
@@ -30839,7 +30839,7 @@
         <p:spPr>
           <a:xfrm>
             <a:off x="21856700" y="11074400"/>
-            <a:ext cx="1163726" cy="368301"/>
+            <a:ext cx="1163726" cy="368300"/>
           </a:xfrm>
           <a:prstGeom prst="rect">
             <a:avLst/>

--- a/export/Sovereign by habit.pptx
+++ b/export/Sovereign by habit.pptx
@@ -571,7 +571,7 @@
           <a:p>
             <a:pPr/>
             <a:r>
-              <a:t>Let’s start by the definitions. Two words run through the whole talk.</a:t>
+              <a:t>Let’s start with the definitions. Two words run through the whole talk.</a:t>
             </a:r>
           </a:p>
           <a:p>
@@ -823,7 +823,7 @@
           <a:p>
             <a:pPr/>
             <a:r>
-              <a:t>The everyday work runs on its own: monitoring and heartbeats, backups, certificate renewals and cleanups on a schedule. Updates are the one step a person reviews before they go live.</a:t>
+              <a:t>The everyday work runs on its own: monitoring and heartbeats, backups, certificate renewals and cleanups on a schedule.</a:t>
             </a:r>
           </a:p>
         </p:txBody>
@@ -1507,19 +1507,19 @@
           <a:p>
             <a:pPr/>
             <a:r>
-              <a:t>A few concrete things to try, depending on where you are.</a:t>
-            </a:r>
-          </a:p>
-          <a:p>
-            <a:pPr/>
-            <a:r>
-              <a:t>If you are just starting: self-hosting starts on your own computer. Run one service locally, a local AI model, your notes, your dev environment, and read its configuration files, not just the docs. Then rent the smallest server you can find and set it up yourself once. Lock yourself out on purpose and get back in through the console. And write every step down, because next month the list becomes your script.</a:t>
-            </a:r>
-          </a:p>
-          <a:p>
-            <a:pPr/>
-            <a:r>
-              <a:t>If you do it for a living: take one service you rent today and run it yourself. Swap one installed package for a source build, and learn its build options. And test your exit. Restore a backup, move one service to another provider. If it takes weeks, you are locked in.</a:t>
+              <a:t>A few concrete things to try.</a:t>
+            </a:r>
+          </a:p>
+          <a:p>
+            <a:pPr/>
+            <a:r>
+              <a:t>New to running servers: start on your own computer. Use Linux, run one service and read its config files, not just the docs. Then rent the smallest VPS, for example from UpCloud, and set it up yourself: SSH keys, firewall, nginx and TLS. Write every step down and start scripting.</a:t>
+            </a:r>
+          </a:p>
+          <a:p>
+            <a:pPr/>
+            <a:r>
+              <a:t>Already running servers: move one service you subscribe to onto your own server, like Plausible for analytics or Outline for docs. Swap one installed package for a source build and see if it compiles from a script or with Ansible. And test your exit. Restore a backup and move one service to another provider. If it takes weeks, you are locked in.</a:t>
             </a:r>
           </a:p>
         </p:txBody>
@@ -1912,12 +1912,6 @@
             <a:pPr/>
             <a:r>
               <a:t>And to be fair, everything is contained at some level: a container, a virtual machine, a rented server in somebody's datacentre. The question for me has always been how much of the box I can see into.</a:t>
-            </a:r>
-          </a:p>
-          <a:p>
-            <a:pPr/>
-            <a:r>
-              <a:t>I know these servers are set up one by one. I will come back to the problems later.</a:t>
             </a:r>
           </a:p>
         </p:txBody>
@@ -6933,8 +6927,8 @@
         </p:nvSpPr>
         <p:spPr>
           <a:xfrm>
-            <a:off x="1270000" y="6553200"/>
-            <a:ext cx="3429000" cy="546100"/>
+            <a:off x="1270000" y="6553199"/>
+            <a:ext cx="3429000" cy="546101"/>
           </a:xfrm>
           <a:prstGeom prst="rect">
             <a:avLst/>
@@ -6982,7 +6976,7 @@
         <p:spPr>
           <a:xfrm>
             <a:off x="1270000" y="8382000"/>
-            <a:ext cx="3429000" cy="533400"/>
+            <a:ext cx="3429000" cy="533401"/>
           </a:xfrm>
           <a:prstGeom prst="rect">
             <a:avLst/>
@@ -7029,8 +7023,8 @@
         </p:nvSpPr>
         <p:spPr>
           <a:xfrm>
-            <a:off x="1269999" y="8915400"/>
-            <a:ext cx="3175001" cy="457200"/>
+            <a:off x="1270000" y="8915399"/>
+            <a:ext cx="3175000" cy="457201"/>
           </a:xfrm>
           <a:prstGeom prst="rect">
             <a:avLst/>
@@ -7077,8 +7071,8 @@
         </p:nvSpPr>
         <p:spPr>
           <a:xfrm>
-            <a:off x="4953000" y="6553200"/>
-            <a:ext cx="3429000" cy="546100"/>
+            <a:off x="4953000" y="6553199"/>
+            <a:ext cx="3429000" cy="546101"/>
           </a:xfrm>
           <a:prstGeom prst="rect">
             <a:avLst/>
@@ -7126,7 +7120,7 @@
         <p:spPr>
           <a:xfrm>
             <a:off x="4953000" y="8382000"/>
-            <a:ext cx="3429000" cy="533400"/>
+            <a:ext cx="3429000" cy="533401"/>
           </a:xfrm>
           <a:prstGeom prst="rect">
             <a:avLst/>
@@ -7173,8 +7167,8 @@
         </p:nvSpPr>
         <p:spPr>
           <a:xfrm>
-            <a:off x="4953000" y="8915400"/>
-            <a:ext cx="3175000" cy="777240"/>
+            <a:off x="4953000" y="8915399"/>
+            <a:ext cx="3175000" cy="777241"/>
           </a:xfrm>
           <a:prstGeom prst="rect">
             <a:avLst/>
@@ -7223,8 +7217,8 @@
         </p:nvSpPr>
         <p:spPr>
           <a:xfrm>
-            <a:off x="8636000" y="6553200"/>
-            <a:ext cx="3429000" cy="546100"/>
+            <a:off x="8636000" y="6553199"/>
+            <a:ext cx="3429000" cy="546101"/>
           </a:xfrm>
           <a:prstGeom prst="rect">
             <a:avLst/>
@@ -7272,7 +7266,7 @@
         <p:spPr>
           <a:xfrm>
             <a:off x="8636000" y="8382000"/>
-            <a:ext cx="3429000" cy="533400"/>
+            <a:ext cx="3429000" cy="533401"/>
           </a:xfrm>
           <a:prstGeom prst="rect">
             <a:avLst/>
@@ -7319,8 +7313,8 @@
         </p:nvSpPr>
         <p:spPr>
           <a:xfrm>
-            <a:off x="8636000" y="8915400"/>
-            <a:ext cx="3175000" cy="777240"/>
+            <a:off x="8636000" y="8915399"/>
+            <a:ext cx="3175000" cy="777241"/>
           </a:xfrm>
           <a:prstGeom prst="rect">
             <a:avLst/>
@@ -7369,8 +7363,8 @@
         </p:nvSpPr>
         <p:spPr>
           <a:xfrm>
-            <a:off x="12319000" y="6553200"/>
-            <a:ext cx="3429000" cy="546100"/>
+            <a:off x="12319000" y="6553199"/>
+            <a:ext cx="3429000" cy="546101"/>
           </a:xfrm>
           <a:prstGeom prst="rect">
             <a:avLst/>
@@ -7418,7 +7412,7 @@
         <p:spPr>
           <a:xfrm>
             <a:off x="12319000" y="8382000"/>
-            <a:ext cx="3429000" cy="533400"/>
+            <a:ext cx="3429000" cy="533401"/>
           </a:xfrm>
           <a:prstGeom prst="rect">
             <a:avLst/>
@@ -7466,7 +7460,7 @@
         <p:spPr>
           <a:xfrm>
             <a:off x="12319000" y="8915400"/>
-            <a:ext cx="3175000" cy="1097280"/>
+            <a:ext cx="3175000" cy="1097281"/>
           </a:xfrm>
           <a:prstGeom prst="rect">
             <a:avLst/>
@@ -7519,8 +7513,8 @@
         </p:nvSpPr>
         <p:spPr>
           <a:xfrm>
-            <a:off x="16002000" y="6553200"/>
-            <a:ext cx="3429000" cy="546100"/>
+            <a:off x="16002000" y="6553199"/>
+            <a:ext cx="3429000" cy="546101"/>
           </a:xfrm>
           <a:prstGeom prst="rect">
             <a:avLst/>
@@ -7568,7 +7562,7 @@
         <p:spPr>
           <a:xfrm>
             <a:off x="16002000" y="8382000"/>
-            <a:ext cx="3429000" cy="533400"/>
+            <a:ext cx="3429000" cy="533401"/>
           </a:xfrm>
           <a:prstGeom prst="rect">
             <a:avLst/>
@@ -7616,7 +7610,7 @@
         <p:spPr>
           <a:xfrm>
             <a:off x="16002000" y="8915400"/>
-            <a:ext cx="3175000" cy="1097280"/>
+            <a:ext cx="3175000" cy="1097281"/>
           </a:xfrm>
           <a:prstGeom prst="rect">
             <a:avLst/>
@@ -7669,8 +7663,8 @@
         </p:nvSpPr>
         <p:spPr>
           <a:xfrm>
-            <a:off x="19685000" y="6553200"/>
-            <a:ext cx="3429000" cy="546100"/>
+            <a:off x="19685000" y="6553199"/>
+            <a:ext cx="3429000" cy="546101"/>
           </a:xfrm>
           <a:prstGeom prst="rect">
             <a:avLst/>
@@ -7718,7 +7712,7 @@
         <p:spPr>
           <a:xfrm>
             <a:off x="19685000" y="8382000"/>
-            <a:ext cx="3429000" cy="533400"/>
+            <a:ext cx="3429000" cy="533401"/>
           </a:xfrm>
           <a:prstGeom prst="rect">
             <a:avLst/>
@@ -7766,7 +7760,7 @@
         <p:spPr>
           <a:xfrm>
             <a:off x="19685000" y="8915400"/>
-            <a:ext cx="3175000" cy="1097280"/>
+            <a:ext cx="3175000" cy="1097281"/>
           </a:xfrm>
           <a:prstGeom prst="rect">
             <a:avLst/>
@@ -22261,8 +22255,8 @@
         </p:nvSpPr>
         <p:spPr>
           <a:xfrm>
-            <a:off x="13614400" y="7950200"/>
-            <a:ext cx="9398000" cy="1042670"/>
+            <a:off x="13614400" y="7950199"/>
+            <a:ext cx="9398000" cy="1042671"/>
           </a:xfrm>
           <a:prstGeom prst="rect">
             <a:avLst/>
